--- a/Docs/ArchitectureIs/README.pptx
+++ b/Docs/ArchitectureIs/README.pptx
@@ -270,7 +270,7 @@
           <a:p>
             <a:fld id="{A556ABB1-B727-42E1-97D8-FD52BC4C149B}" type="datetimeFigureOut">
               <a:rPr lang="ko-KR" altLang="en-US" smtClean="0"/>
-              <a:t>2025-11-28</a:t>
+              <a:t>2025-11-29</a:t>
             </a:fld>
             <a:endParaRPr lang="ko-KR" altLang="en-US"/>
           </a:p>
@@ -468,7 +468,7 @@
           <a:p>
             <a:fld id="{A556ABB1-B727-42E1-97D8-FD52BC4C149B}" type="datetimeFigureOut">
               <a:rPr lang="ko-KR" altLang="en-US" smtClean="0"/>
-              <a:t>2025-11-28</a:t>
+              <a:t>2025-11-29</a:t>
             </a:fld>
             <a:endParaRPr lang="ko-KR" altLang="en-US"/>
           </a:p>
@@ -676,7 +676,7 @@
           <a:p>
             <a:fld id="{A556ABB1-B727-42E1-97D8-FD52BC4C149B}" type="datetimeFigureOut">
               <a:rPr lang="ko-KR" altLang="en-US" smtClean="0"/>
-              <a:t>2025-11-28</a:t>
+              <a:t>2025-11-29</a:t>
             </a:fld>
             <a:endParaRPr lang="ko-KR" altLang="en-US"/>
           </a:p>
@@ -874,7 +874,7 @@
           <a:p>
             <a:fld id="{A556ABB1-B727-42E1-97D8-FD52BC4C149B}" type="datetimeFigureOut">
               <a:rPr lang="ko-KR" altLang="en-US" smtClean="0"/>
-              <a:t>2025-11-28</a:t>
+              <a:t>2025-11-29</a:t>
             </a:fld>
             <a:endParaRPr lang="ko-KR" altLang="en-US"/>
           </a:p>
@@ -1149,7 +1149,7 @@
           <a:p>
             <a:fld id="{A556ABB1-B727-42E1-97D8-FD52BC4C149B}" type="datetimeFigureOut">
               <a:rPr lang="ko-KR" altLang="en-US" smtClean="0"/>
-              <a:t>2025-11-28</a:t>
+              <a:t>2025-11-29</a:t>
             </a:fld>
             <a:endParaRPr lang="ko-KR" altLang="en-US"/>
           </a:p>
@@ -1414,7 +1414,7 @@
           <a:p>
             <a:fld id="{A556ABB1-B727-42E1-97D8-FD52BC4C149B}" type="datetimeFigureOut">
               <a:rPr lang="ko-KR" altLang="en-US" smtClean="0"/>
-              <a:t>2025-11-28</a:t>
+              <a:t>2025-11-29</a:t>
             </a:fld>
             <a:endParaRPr lang="ko-KR" altLang="en-US"/>
           </a:p>
@@ -1826,7 +1826,7 @@
           <a:p>
             <a:fld id="{A556ABB1-B727-42E1-97D8-FD52BC4C149B}" type="datetimeFigureOut">
               <a:rPr lang="ko-KR" altLang="en-US" smtClean="0"/>
-              <a:t>2025-11-28</a:t>
+              <a:t>2025-11-29</a:t>
             </a:fld>
             <a:endParaRPr lang="ko-KR" altLang="en-US"/>
           </a:p>
@@ -1967,7 +1967,7 @@
           <a:p>
             <a:fld id="{A556ABB1-B727-42E1-97D8-FD52BC4C149B}" type="datetimeFigureOut">
               <a:rPr lang="ko-KR" altLang="en-US" smtClean="0"/>
-              <a:t>2025-11-28</a:t>
+              <a:t>2025-11-29</a:t>
             </a:fld>
             <a:endParaRPr lang="ko-KR" altLang="en-US"/>
           </a:p>
@@ -2080,7 +2080,7 @@
           <a:p>
             <a:fld id="{A556ABB1-B727-42E1-97D8-FD52BC4C149B}" type="datetimeFigureOut">
               <a:rPr lang="ko-KR" altLang="en-US" smtClean="0"/>
-              <a:t>2025-11-28</a:t>
+              <a:t>2025-11-29</a:t>
             </a:fld>
             <a:endParaRPr lang="ko-KR" altLang="en-US"/>
           </a:p>
@@ -2391,7 +2391,7 @@
           <a:p>
             <a:fld id="{A556ABB1-B727-42E1-97D8-FD52BC4C149B}" type="datetimeFigureOut">
               <a:rPr lang="ko-KR" altLang="en-US" smtClean="0"/>
-              <a:t>2025-11-28</a:t>
+              <a:t>2025-11-29</a:t>
             </a:fld>
             <a:endParaRPr lang="ko-KR" altLang="en-US"/>
           </a:p>
@@ -2679,7 +2679,7 @@
           <a:p>
             <a:fld id="{A556ABB1-B727-42E1-97D8-FD52BC4C149B}" type="datetimeFigureOut">
               <a:rPr lang="ko-KR" altLang="en-US" smtClean="0"/>
-              <a:t>2025-11-28</a:t>
+              <a:t>2025-11-29</a:t>
             </a:fld>
             <a:endParaRPr lang="ko-KR" altLang="en-US"/>
           </a:p>
@@ -2920,7 +2920,7 @@
           <a:p>
             <a:fld id="{A556ABB1-B727-42E1-97D8-FD52BC4C149B}" type="datetimeFigureOut">
               <a:rPr lang="ko-KR" altLang="en-US" smtClean="0"/>
-              <a:t>2025-11-28</a:t>
+              <a:t>2025-11-29</a:t>
             </a:fld>
             <a:endParaRPr lang="ko-KR" altLang="en-US"/>
           </a:p>
@@ -8238,7 +8238,7 @@
         </p:nvSpPr>
         <p:spPr>
           <a:xfrm>
-            <a:off x="7087990" y="2235191"/>
+            <a:off x="7087990" y="1712420"/>
             <a:ext cx="1488228" cy="737189"/>
           </a:xfrm>
           <a:prstGeom prst="rect">
@@ -9440,6 +9440,70 @@
                 </a:solidFill>
               </a:rPr>
               <a:t>IFin&lt;T&gt;</a:t>
+            </a:r>
+            <a:endParaRPr lang="ko-KR" altLang="en-US" sz="1600" b="1">
+              <a:solidFill>
+                <a:srgbClr val="C00000"/>
+              </a:solidFill>
+            </a:endParaRPr>
+          </a:p>
+        </p:txBody>
+      </p:sp>
+      <p:sp>
+        <p:nvSpPr>
+          <p:cNvPr id="21" name="TextBox 20">
+            <a:extLst>
+              <a:ext uri="{FF2B5EF4-FFF2-40B4-BE49-F238E27FC236}">
+                <a16:creationId xmlns:a16="http://schemas.microsoft.com/office/drawing/2014/main" id="{7EF488EB-638F-A6BA-3549-F5F6648430E2}"/>
+              </a:ext>
+            </a:extLst>
+          </p:cNvPr>
+          <p:cNvSpPr txBox="1"/>
+          <p:nvPr/>
+        </p:nvSpPr>
+        <p:spPr>
+          <a:xfrm>
+            <a:off x="7126526" y="2463787"/>
+            <a:ext cx="1411156" cy="737189"/>
+          </a:xfrm>
+          <a:prstGeom prst="rect">
+            <a:avLst/>
+          </a:prstGeom>
+          <a:noFill/>
+        </p:spPr>
+        <p:txBody>
+          <a:bodyPr wrap="none" rtlCol="0">
+            <a:spAutoFit/>
+          </a:bodyPr>
+          <a:lstStyle/>
+          <a:p>
+            <a:pPr algn="ctr">
+              <a:lnSpc>
+                <a:spcPct val="150000"/>
+              </a:lnSpc>
+            </a:pPr>
+            <a:r>
+              <a:rPr lang="en-US" altLang="ko-KR" sz="1400">
+                <a:solidFill>
+                  <a:srgbClr val="C00000"/>
+                </a:solidFill>
+              </a:rPr>
+              <a:t>Functional</a:t>
+            </a:r>
+          </a:p>
+          <a:p>
+            <a:pPr algn="ctr">
+              <a:lnSpc>
+                <a:spcPct val="150000"/>
+              </a:lnSpc>
+            </a:pPr>
+            <a:r>
+              <a:rPr lang="en-US" altLang="ko-KR" sz="1600" b="1">
+                <a:solidFill>
+                  <a:srgbClr val="C00000"/>
+                </a:solidFill>
+              </a:rPr>
+              <a:t>IFinT&lt;IO, T&gt;</a:t>
             </a:r>
             <a:endParaRPr lang="ko-KR" altLang="en-US" sz="1600" b="1">
               <a:solidFill>

--- a/Docs/ArchitectureIs/README.pptx
+++ b/Docs/ArchitectureIs/README.pptx
@@ -13,10 +13,11 @@
     <p:sldId id="262" r:id="rId7"/>
     <p:sldId id="268" r:id="rId8"/>
     <p:sldId id="265" r:id="rId9"/>
-    <p:sldId id="269" r:id="rId10"/>
-    <p:sldId id="267" r:id="rId11"/>
-    <p:sldId id="263" r:id="rId12"/>
-    <p:sldId id="259" r:id="rId13"/>
+    <p:sldId id="271" r:id="rId10"/>
+    <p:sldId id="269" r:id="rId11"/>
+    <p:sldId id="267" r:id="rId12"/>
+    <p:sldId id="263" r:id="rId13"/>
+    <p:sldId id="259" r:id="rId14"/>
   </p:sldIdLst>
   <p:sldSz cx="12192000" cy="6858000"/>
   <p:notesSz cx="6858000" cy="9144000"/>
@@ -270,7 +271,7 @@
           <a:p>
             <a:fld id="{A556ABB1-B727-42E1-97D8-FD52BC4C149B}" type="datetimeFigureOut">
               <a:rPr lang="ko-KR" altLang="en-US" smtClean="0"/>
-              <a:t>2025-11-29</a:t>
+              <a:t>2026-01-20</a:t>
             </a:fld>
             <a:endParaRPr lang="ko-KR" altLang="en-US"/>
           </a:p>
@@ -468,7 +469,7 @@
           <a:p>
             <a:fld id="{A556ABB1-B727-42E1-97D8-FD52BC4C149B}" type="datetimeFigureOut">
               <a:rPr lang="ko-KR" altLang="en-US" smtClean="0"/>
-              <a:t>2025-11-29</a:t>
+              <a:t>2026-01-20</a:t>
             </a:fld>
             <a:endParaRPr lang="ko-KR" altLang="en-US"/>
           </a:p>
@@ -676,7 +677,7 @@
           <a:p>
             <a:fld id="{A556ABB1-B727-42E1-97D8-FD52BC4C149B}" type="datetimeFigureOut">
               <a:rPr lang="ko-KR" altLang="en-US" smtClean="0"/>
-              <a:t>2025-11-29</a:t>
+              <a:t>2026-01-20</a:t>
             </a:fld>
             <a:endParaRPr lang="ko-KR" altLang="en-US"/>
           </a:p>
@@ -874,7 +875,7 @@
           <a:p>
             <a:fld id="{A556ABB1-B727-42E1-97D8-FD52BC4C149B}" type="datetimeFigureOut">
               <a:rPr lang="ko-KR" altLang="en-US" smtClean="0"/>
-              <a:t>2025-11-29</a:t>
+              <a:t>2026-01-20</a:t>
             </a:fld>
             <a:endParaRPr lang="ko-KR" altLang="en-US"/>
           </a:p>
@@ -1149,7 +1150,7 @@
           <a:p>
             <a:fld id="{A556ABB1-B727-42E1-97D8-FD52BC4C149B}" type="datetimeFigureOut">
               <a:rPr lang="ko-KR" altLang="en-US" smtClean="0"/>
-              <a:t>2025-11-29</a:t>
+              <a:t>2026-01-20</a:t>
             </a:fld>
             <a:endParaRPr lang="ko-KR" altLang="en-US"/>
           </a:p>
@@ -1414,7 +1415,7 @@
           <a:p>
             <a:fld id="{A556ABB1-B727-42E1-97D8-FD52BC4C149B}" type="datetimeFigureOut">
               <a:rPr lang="ko-KR" altLang="en-US" smtClean="0"/>
-              <a:t>2025-11-29</a:t>
+              <a:t>2026-01-20</a:t>
             </a:fld>
             <a:endParaRPr lang="ko-KR" altLang="en-US"/>
           </a:p>
@@ -1826,7 +1827,7 @@
           <a:p>
             <a:fld id="{A556ABB1-B727-42E1-97D8-FD52BC4C149B}" type="datetimeFigureOut">
               <a:rPr lang="ko-KR" altLang="en-US" smtClean="0"/>
-              <a:t>2025-11-29</a:t>
+              <a:t>2026-01-20</a:t>
             </a:fld>
             <a:endParaRPr lang="ko-KR" altLang="en-US"/>
           </a:p>
@@ -1967,7 +1968,7 @@
           <a:p>
             <a:fld id="{A556ABB1-B727-42E1-97D8-FD52BC4C149B}" type="datetimeFigureOut">
               <a:rPr lang="ko-KR" altLang="en-US" smtClean="0"/>
-              <a:t>2025-11-29</a:t>
+              <a:t>2026-01-20</a:t>
             </a:fld>
             <a:endParaRPr lang="ko-KR" altLang="en-US"/>
           </a:p>
@@ -2080,7 +2081,7 @@
           <a:p>
             <a:fld id="{A556ABB1-B727-42E1-97D8-FD52BC4C149B}" type="datetimeFigureOut">
               <a:rPr lang="ko-KR" altLang="en-US" smtClean="0"/>
-              <a:t>2025-11-29</a:t>
+              <a:t>2026-01-20</a:t>
             </a:fld>
             <a:endParaRPr lang="ko-KR" altLang="en-US"/>
           </a:p>
@@ -2391,7 +2392,7 @@
           <a:p>
             <a:fld id="{A556ABB1-B727-42E1-97D8-FD52BC4C149B}" type="datetimeFigureOut">
               <a:rPr lang="ko-KR" altLang="en-US" smtClean="0"/>
-              <a:t>2025-11-29</a:t>
+              <a:t>2026-01-20</a:t>
             </a:fld>
             <a:endParaRPr lang="ko-KR" altLang="en-US"/>
           </a:p>
@@ -2679,7 +2680,7 @@
           <a:p>
             <a:fld id="{A556ABB1-B727-42E1-97D8-FD52BC4C149B}" type="datetimeFigureOut">
               <a:rPr lang="ko-KR" altLang="en-US" smtClean="0"/>
-              <a:t>2025-11-29</a:t>
+              <a:t>2026-01-20</a:t>
             </a:fld>
             <a:endParaRPr lang="ko-KR" altLang="en-US"/>
           </a:p>
@@ -2920,7 +2921,7 @@
           <a:p>
             <a:fld id="{A556ABB1-B727-42E1-97D8-FD52BC4C149B}" type="datetimeFigureOut">
               <a:rPr lang="ko-KR" altLang="en-US" smtClean="0"/>
-              <a:t>2025-11-29</a:t>
+              <a:t>2026-01-20</a:t>
             </a:fld>
             <a:endParaRPr lang="ko-KR" altLang="en-US"/>
           </a:p>
@@ -3455,6 +3456,1333 @@
 </file>
 
 <file path=ppt/slides/slide10.xml><?xml version="1.0" encoding="utf-8"?>
+<p:sld xmlns:a="http://schemas.openxmlformats.org/drawingml/2006/main" xmlns:r="http://schemas.openxmlformats.org/officeDocument/2006/relationships" xmlns:p="http://schemas.openxmlformats.org/presentationml/2006/main">
+  <p:cSld>
+    <p:spTree>
+      <p:nvGrpSpPr>
+        <p:cNvPr id="1" name="">
+          <a:extLst>
+            <a:ext uri="{FF2B5EF4-FFF2-40B4-BE49-F238E27FC236}">
+              <a16:creationId xmlns:a16="http://schemas.microsoft.com/office/drawing/2014/main" id="{FD307D2A-CD3A-F455-9B05-D137C73FFFC1}"/>
+            </a:ext>
+          </a:extLst>
+        </p:cNvPr>
+        <p:cNvGrpSpPr/>
+        <p:nvPr/>
+      </p:nvGrpSpPr>
+      <p:grpSpPr>
+        <a:xfrm>
+          <a:off x="0" y="0"/>
+          <a:ext cx="0" cy="0"/>
+          <a:chOff x="0" y="0"/>
+          <a:chExt cx="0" cy="0"/>
+        </a:xfrm>
+      </p:grpSpPr>
+      <p:grpSp>
+        <p:nvGrpSpPr>
+          <p:cNvPr id="8" name="그룹 7">
+            <a:extLst>
+              <a:ext uri="{FF2B5EF4-FFF2-40B4-BE49-F238E27FC236}">
+                <a16:creationId xmlns:a16="http://schemas.microsoft.com/office/drawing/2014/main" id="{8E566107-522F-E21F-58F7-AD498C8135E3}"/>
+              </a:ext>
+            </a:extLst>
+          </p:cNvPr>
+          <p:cNvGrpSpPr/>
+          <p:nvPr/>
+        </p:nvGrpSpPr>
+        <p:grpSpPr>
+          <a:xfrm>
+            <a:off x="1886918" y="2952054"/>
+            <a:ext cx="8862646" cy="1214438"/>
+            <a:chOff x="2476500" y="2557462"/>
+            <a:chExt cx="7159625" cy="981075"/>
+          </a:xfrm>
+        </p:grpSpPr>
+        <p:pic>
+          <p:nvPicPr>
+            <p:cNvPr id="5" name="그림 4">
+              <a:extLst>
+                <a:ext uri="{FF2B5EF4-FFF2-40B4-BE49-F238E27FC236}">
+                  <a16:creationId xmlns:a16="http://schemas.microsoft.com/office/drawing/2014/main" id="{CB5BE4BC-C2BF-5A34-604A-D69E297E3903}"/>
+                </a:ext>
+              </a:extLst>
+            </p:cNvPr>
+            <p:cNvPicPr>
+              <a:picLocks noChangeAspect="1"/>
+            </p:cNvPicPr>
+            <p:nvPr/>
+          </p:nvPicPr>
+          <p:blipFill>
+            <a:blip r:embed="rId2"/>
+            <a:stretch>
+              <a:fillRect/>
+            </a:stretch>
+          </p:blipFill>
+          <p:spPr>
+            <a:xfrm>
+              <a:off x="2476500" y="2557462"/>
+              <a:ext cx="4257675" cy="981075"/>
+            </a:xfrm>
+            <a:prstGeom prst="rect">
+              <a:avLst/>
+            </a:prstGeom>
+          </p:spPr>
+        </p:pic>
+        <p:pic>
+          <p:nvPicPr>
+            <p:cNvPr id="7" name="그림 6">
+              <a:extLst>
+                <a:ext uri="{FF2B5EF4-FFF2-40B4-BE49-F238E27FC236}">
+                  <a16:creationId xmlns:a16="http://schemas.microsoft.com/office/drawing/2014/main" id="{1563D916-2880-729E-EB84-2B477F21EBDD}"/>
+                </a:ext>
+              </a:extLst>
+            </p:cNvPr>
+            <p:cNvPicPr>
+              <a:picLocks noChangeAspect="1"/>
+            </p:cNvPicPr>
+            <p:nvPr/>
+          </p:nvPicPr>
+          <p:blipFill>
+            <a:blip r:embed="rId3"/>
+            <a:stretch>
+              <a:fillRect/>
+            </a:stretch>
+          </p:blipFill>
+          <p:spPr>
+            <a:xfrm>
+              <a:off x="6588125" y="2563812"/>
+              <a:ext cx="3048000" cy="904875"/>
+            </a:xfrm>
+            <a:prstGeom prst="rect">
+              <a:avLst/>
+            </a:prstGeom>
+          </p:spPr>
+        </p:pic>
+      </p:grpSp>
+      <p:grpSp>
+        <p:nvGrpSpPr>
+          <p:cNvPr id="23" name="그룹 22">
+            <a:extLst>
+              <a:ext uri="{FF2B5EF4-FFF2-40B4-BE49-F238E27FC236}">
+                <a16:creationId xmlns:a16="http://schemas.microsoft.com/office/drawing/2014/main" id="{85E77AA4-1B24-2DDA-9B1A-73AD00BECFD8}"/>
+              </a:ext>
+            </a:extLst>
+          </p:cNvPr>
+          <p:cNvGrpSpPr/>
+          <p:nvPr/>
+        </p:nvGrpSpPr>
+        <p:grpSpPr>
+          <a:xfrm>
+            <a:off x="4679941" y="2290915"/>
+            <a:ext cx="3124200" cy="3593557"/>
+            <a:chOff x="4457700" y="676275"/>
+            <a:chExt cx="3124200" cy="4752975"/>
+          </a:xfrm>
+        </p:grpSpPr>
+        <p:cxnSp>
+          <p:nvCxnSpPr>
+            <p:cNvPr id="12" name="직선 연결선 11">
+              <a:extLst>
+                <a:ext uri="{FF2B5EF4-FFF2-40B4-BE49-F238E27FC236}">
+                  <a16:creationId xmlns:a16="http://schemas.microsoft.com/office/drawing/2014/main" id="{587D70BA-4FF4-AACF-4E0B-2D6A8DF63EA4}"/>
+                </a:ext>
+              </a:extLst>
+            </p:cNvPr>
+            <p:cNvCxnSpPr>
+              <a:cxnSpLocks/>
+            </p:cNvCxnSpPr>
+            <p:nvPr/>
+          </p:nvCxnSpPr>
+          <p:spPr>
+            <a:xfrm>
+              <a:off x="4457700" y="676275"/>
+              <a:ext cx="0" cy="4752975"/>
+            </a:xfrm>
+            <a:prstGeom prst="line">
+              <a:avLst/>
+            </a:prstGeom>
+            <a:ln>
+              <a:solidFill>
+                <a:schemeClr val="bg1">
+                  <a:lumMod val="85000"/>
+                </a:schemeClr>
+              </a:solidFill>
+              <a:prstDash val="dash"/>
+            </a:ln>
+          </p:spPr>
+          <p:style>
+            <a:lnRef idx="2">
+              <a:schemeClr val="accent1"/>
+            </a:lnRef>
+            <a:fillRef idx="0">
+              <a:schemeClr val="accent1"/>
+            </a:fillRef>
+            <a:effectRef idx="1">
+              <a:schemeClr val="accent1"/>
+            </a:effectRef>
+            <a:fontRef idx="minor">
+              <a:schemeClr val="tx1"/>
+            </a:fontRef>
+          </p:style>
+        </p:cxnSp>
+        <p:cxnSp>
+          <p:nvCxnSpPr>
+            <p:cNvPr id="13" name="직선 연결선 12">
+              <a:extLst>
+                <a:ext uri="{FF2B5EF4-FFF2-40B4-BE49-F238E27FC236}">
+                  <a16:creationId xmlns:a16="http://schemas.microsoft.com/office/drawing/2014/main" id="{87F7656D-5091-A174-D73D-5E7E1D9DA361}"/>
+                </a:ext>
+              </a:extLst>
+            </p:cNvPr>
+            <p:cNvCxnSpPr>
+              <a:cxnSpLocks/>
+            </p:cNvCxnSpPr>
+            <p:nvPr/>
+          </p:nvCxnSpPr>
+          <p:spPr>
+            <a:xfrm>
+              <a:off x="7581900" y="676275"/>
+              <a:ext cx="0" cy="4752975"/>
+            </a:xfrm>
+            <a:prstGeom prst="line">
+              <a:avLst/>
+            </a:prstGeom>
+            <a:ln>
+              <a:solidFill>
+                <a:schemeClr val="bg1">
+                  <a:lumMod val="85000"/>
+                </a:schemeClr>
+              </a:solidFill>
+              <a:prstDash val="dash"/>
+            </a:ln>
+          </p:spPr>
+          <p:style>
+            <a:lnRef idx="2">
+              <a:schemeClr val="accent1"/>
+            </a:lnRef>
+            <a:fillRef idx="0">
+              <a:schemeClr val="accent1"/>
+            </a:fillRef>
+            <a:effectRef idx="1">
+              <a:schemeClr val="accent1"/>
+            </a:effectRef>
+            <a:fontRef idx="minor">
+              <a:schemeClr val="tx1"/>
+            </a:fontRef>
+          </p:style>
+        </p:cxnSp>
+      </p:grpSp>
+      <p:grpSp>
+        <p:nvGrpSpPr>
+          <p:cNvPr id="31" name="그룹 30">
+            <a:extLst>
+              <a:ext uri="{FF2B5EF4-FFF2-40B4-BE49-F238E27FC236}">
+                <a16:creationId xmlns:a16="http://schemas.microsoft.com/office/drawing/2014/main" id="{BC38CA11-9DC5-0B2A-2749-2A44E927C324}"/>
+              </a:ext>
+            </a:extLst>
+          </p:cNvPr>
+          <p:cNvGrpSpPr/>
+          <p:nvPr/>
+        </p:nvGrpSpPr>
+        <p:grpSpPr>
+          <a:xfrm>
+            <a:off x="1069966" y="3480384"/>
+            <a:ext cx="10480528" cy="0"/>
+            <a:chOff x="1069966" y="3175585"/>
+            <a:chExt cx="10480528" cy="0"/>
+          </a:xfrm>
+        </p:grpSpPr>
+        <p:cxnSp>
+          <p:nvCxnSpPr>
+            <p:cNvPr id="19" name="직선 화살표 연결선 18">
+              <a:extLst>
+                <a:ext uri="{FF2B5EF4-FFF2-40B4-BE49-F238E27FC236}">
+                  <a16:creationId xmlns:a16="http://schemas.microsoft.com/office/drawing/2014/main" id="{D1961E68-38B7-2979-1470-61D11D9E0255}"/>
+                </a:ext>
+              </a:extLst>
+            </p:cNvPr>
+            <p:cNvCxnSpPr>
+              <a:cxnSpLocks/>
+            </p:cNvCxnSpPr>
+            <p:nvPr/>
+          </p:nvCxnSpPr>
+          <p:spPr>
+            <a:xfrm>
+              <a:off x="1069966" y="3175585"/>
+              <a:ext cx="926953" cy="0"/>
+            </a:xfrm>
+            <a:prstGeom prst="straightConnector1">
+              <a:avLst/>
+            </a:prstGeom>
+            <a:ln>
+              <a:tailEnd type="triangle"/>
+            </a:ln>
+          </p:spPr>
+          <p:style>
+            <a:lnRef idx="2">
+              <a:schemeClr val="accent1"/>
+            </a:lnRef>
+            <a:fillRef idx="0">
+              <a:schemeClr val="accent1"/>
+            </a:fillRef>
+            <a:effectRef idx="1">
+              <a:schemeClr val="accent1"/>
+            </a:effectRef>
+            <a:fontRef idx="minor">
+              <a:schemeClr val="tx1"/>
+            </a:fontRef>
+          </p:style>
+        </p:cxnSp>
+        <p:cxnSp>
+          <p:nvCxnSpPr>
+            <p:cNvPr id="20" name="직선 화살표 연결선 19">
+              <a:extLst>
+                <a:ext uri="{FF2B5EF4-FFF2-40B4-BE49-F238E27FC236}">
+                  <a16:creationId xmlns:a16="http://schemas.microsoft.com/office/drawing/2014/main" id="{B7F63BC9-1184-75E2-E8FF-01F016D315EB}"/>
+                </a:ext>
+              </a:extLst>
+            </p:cNvPr>
+            <p:cNvCxnSpPr>
+              <a:cxnSpLocks/>
+            </p:cNvCxnSpPr>
+            <p:nvPr/>
+          </p:nvCxnSpPr>
+          <p:spPr>
+            <a:xfrm>
+              <a:off x="10623541" y="3175585"/>
+              <a:ext cx="926953" cy="0"/>
+            </a:xfrm>
+            <a:prstGeom prst="straightConnector1">
+              <a:avLst/>
+            </a:prstGeom>
+            <a:ln>
+              <a:tailEnd type="triangle"/>
+            </a:ln>
+          </p:spPr>
+          <p:style>
+            <a:lnRef idx="2">
+              <a:schemeClr val="accent1"/>
+            </a:lnRef>
+            <a:fillRef idx="0">
+              <a:schemeClr val="accent1"/>
+            </a:fillRef>
+            <a:effectRef idx="1">
+              <a:schemeClr val="accent1"/>
+            </a:effectRef>
+            <a:fontRef idx="minor">
+              <a:schemeClr val="tx1"/>
+            </a:fontRef>
+          </p:style>
+        </p:cxnSp>
+      </p:grpSp>
+      <p:sp>
+        <p:nvSpPr>
+          <p:cNvPr id="22" name="직사각형 21">
+            <a:extLst>
+              <a:ext uri="{FF2B5EF4-FFF2-40B4-BE49-F238E27FC236}">
+                <a16:creationId xmlns:a16="http://schemas.microsoft.com/office/drawing/2014/main" id="{C3BEE7B2-2CD3-0446-B6B2-FC441B6A6B03}"/>
+              </a:ext>
+            </a:extLst>
+          </p:cNvPr>
+          <p:cNvSpPr/>
+          <p:nvPr/>
+        </p:nvSpPr>
+        <p:spPr>
+          <a:xfrm>
+            <a:off x="5463252" y="5105868"/>
+            <a:ext cx="1513301" cy="758941"/>
+          </a:xfrm>
+          <a:prstGeom prst="rect">
+            <a:avLst/>
+          </a:prstGeom>
+          <a:noFill/>
+          <a:ln>
+            <a:solidFill>
+              <a:srgbClr val="A4A4A4"/>
+            </a:solidFill>
+          </a:ln>
+        </p:spPr>
+        <p:style>
+          <a:lnRef idx="2">
+            <a:schemeClr val="accent1">
+              <a:shade val="15000"/>
+            </a:schemeClr>
+          </a:lnRef>
+          <a:fillRef idx="1">
+            <a:schemeClr val="accent1"/>
+          </a:fillRef>
+          <a:effectRef idx="0">
+            <a:schemeClr val="accent1"/>
+          </a:effectRef>
+          <a:fontRef idx="minor">
+            <a:schemeClr val="lt1"/>
+          </a:fontRef>
+        </p:style>
+        <p:txBody>
+          <a:bodyPr rtlCol="0" anchor="ctr"/>
+          <a:lstStyle/>
+          <a:p>
+            <a:pPr algn="ctr"/>
+            <a:endParaRPr lang="ko-KR" altLang="en-US"/>
+          </a:p>
+        </p:txBody>
+      </p:sp>
+      <p:cxnSp>
+        <p:nvCxnSpPr>
+          <p:cNvPr id="24" name="직선 화살표 연결선 23">
+            <a:extLst>
+              <a:ext uri="{FF2B5EF4-FFF2-40B4-BE49-F238E27FC236}">
+                <a16:creationId xmlns:a16="http://schemas.microsoft.com/office/drawing/2014/main" id="{81D521E4-3049-C7CC-E4E3-4B1C2DA6CC82}"/>
+              </a:ext>
+            </a:extLst>
+          </p:cNvPr>
+          <p:cNvCxnSpPr>
+            <a:cxnSpLocks/>
+          </p:cNvCxnSpPr>
+          <p:nvPr/>
+        </p:nvCxnSpPr>
+        <p:spPr>
+          <a:xfrm>
+            <a:off x="6219903" y="3852167"/>
+            <a:ext cx="0" cy="1253701"/>
+          </a:xfrm>
+          <a:prstGeom prst="straightConnector1">
+            <a:avLst/>
+          </a:prstGeom>
+          <a:ln>
+            <a:solidFill>
+              <a:srgbClr val="A4A4A4"/>
+            </a:solidFill>
+            <a:tailEnd type="triangle"/>
+          </a:ln>
+        </p:spPr>
+        <p:style>
+          <a:lnRef idx="2">
+            <a:schemeClr val="accent1"/>
+          </a:lnRef>
+          <a:fillRef idx="0">
+            <a:schemeClr val="accent1"/>
+          </a:fillRef>
+          <a:effectRef idx="1">
+            <a:schemeClr val="accent1"/>
+          </a:effectRef>
+          <a:fontRef idx="minor">
+            <a:schemeClr val="tx1"/>
+          </a:fontRef>
+        </p:style>
+      </p:cxnSp>
+      <p:sp>
+        <p:nvSpPr>
+          <p:cNvPr id="25" name="직사각형 24">
+            <a:extLst>
+              <a:ext uri="{FF2B5EF4-FFF2-40B4-BE49-F238E27FC236}">
+                <a16:creationId xmlns:a16="http://schemas.microsoft.com/office/drawing/2014/main" id="{322FA9A3-979D-361D-2BE7-ECF9F40A2FAD}"/>
+              </a:ext>
+            </a:extLst>
+          </p:cNvPr>
+          <p:cNvSpPr/>
+          <p:nvPr/>
+        </p:nvSpPr>
+        <p:spPr>
+          <a:xfrm flipV="1">
+            <a:off x="6083022" y="3609338"/>
+            <a:ext cx="273761" cy="242829"/>
+          </a:xfrm>
+          <a:prstGeom prst="rect">
+            <a:avLst/>
+          </a:prstGeom>
+          <a:noFill/>
+          <a:ln>
+            <a:noFill/>
+          </a:ln>
+        </p:spPr>
+        <p:style>
+          <a:lnRef idx="2">
+            <a:schemeClr val="accent1">
+              <a:shade val="15000"/>
+            </a:schemeClr>
+          </a:lnRef>
+          <a:fillRef idx="1">
+            <a:schemeClr val="accent1"/>
+          </a:fillRef>
+          <a:effectRef idx="0">
+            <a:schemeClr val="accent1"/>
+          </a:effectRef>
+          <a:fontRef idx="minor">
+            <a:schemeClr val="lt1"/>
+          </a:fontRef>
+        </p:style>
+        <p:txBody>
+          <a:bodyPr rtlCol="0" anchor="ctr"/>
+          <a:lstStyle/>
+          <a:p>
+            <a:pPr algn="ctr"/>
+            <a:endParaRPr lang="ko-KR" altLang="en-US">
+              <a:noFill/>
+            </a:endParaRPr>
+          </a:p>
+        </p:txBody>
+      </p:sp>
+      <p:sp>
+        <p:nvSpPr>
+          <p:cNvPr id="26" name="직사각형 25">
+            <a:extLst>
+              <a:ext uri="{FF2B5EF4-FFF2-40B4-BE49-F238E27FC236}">
+                <a16:creationId xmlns:a16="http://schemas.microsoft.com/office/drawing/2014/main" id="{45460BC6-DCC8-0C50-2422-A76079D27C82}"/>
+              </a:ext>
+            </a:extLst>
+          </p:cNvPr>
+          <p:cNvSpPr/>
+          <p:nvPr/>
+        </p:nvSpPr>
+        <p:spPr>
+          <a:xfrm flipV="1">
+            <a:off x="6083022" y="5105868"/>
+            <a:ext cx="273761" cy="242829"/>
+          </a:xfrm>
+          <a:prstGeom prst="rect">
+            <a:avLst/>
+          </a:prstGeom>
+          <a:noFill/>
+          <a:ln>
+            <a:noFill/>
+          </a:ln>
+        </p:spPr>
+        <p:style>
+          <a:lnRef idx="2">
+            <a:schemeClr val="accent1">
+              <a:shade val="15000"/>
+            </a:schemeClr>
+          </a:lnRef>
+          <a:fillRef idx="1">
+            <a:schemeClr val="accent1"/>
+          </a:fillRef>
+          <a:effectRef idx="0">
+            <a:schemeClr val="accent1"/>
+          </a:effectRef>
+          <a:fontRef idx="minor">
+            <a:schemeClr val="lt1"/>
+          </a:fontRef>
+        </p:style>
+        <p:txBody>
+          <a:bodyPr rtlCol="0" anchor="ctr"/>
+          <a:lstStyle/>
+          <a:p>
+            <a:pPr algn="ctr"/>
+            <a:endParaRPr lang="ko-KR" altLang="en-US">
+              <a:noFill/>
+            </a:endParaRPr>
+          </a:p>
+        </p:txBody>
+      </p:sp>
+      <p:sp>
+        <p:nvSpPr>
+          <p:cNvPr id="3" name="TextBox 2">
+            <a:extLst>
+              <a:ext uri="{FF2B5EF4-FFF2-40B4-BE49-F238E27FC236}">
+                <a16:creationId xmlns:a16="http://schemas.microsoft.com/office/drawing/2014/main" id="{0F9B973E-3BD3-A604-6C54-D626FD0B71FC}"/>
+              </a:ext>
+            </a:extLst>
+          </p:cNvPr>
+          <p:cNvSpPr txBox="1"/>
+          <p:nvPr/>
+        </p:nvSpPr>
+        <p:spPr>
+          <a:xfrm>
+            <a:off x="5743292" y="5316061"/>
+            <a:ext cx="946093" cy="338554"/>
+          </a:xfrm>
+          <a:prstGeom prst="rect">
+            <a:avLst/>
+          </a:prstGeom>
+          <a:noFill/>
+        </p:spPr>
+        <p:txBody>
+          <a:bodyPr wrap="none" rtlCol="0">
+            <a:spAutoFit/>
+          </a:bodyPr>
+          <a:lstStyle/>
+          <a:p>
+            <a:r>
+              <a:rPr lang="en-US" altLang="ko-KR" sz="1600" b="1">
+                <a:solidFill>
+                  <a:srgbClr val="708A41"/>
+                </a:solidFill>
+              </a:rPr>
+              <a:t>Domain</a:t>
+            </a:r>
+            <a:endParaRPr lang="ko-KR" altLang="en-US" sz="1600" b="1">
+              <a:solidFill>
+                <a:srgbClr val="708A41"/>
+              </a:solidFill>
+            </a:endParaRPr>
+          </a:p>
+        </p:txBody>
+      </p:sp>
+      <p:sp>
+        <p:nvSpPr>
+          <p:cNvPr id="14" name="타원 13">
+            <a:extLst>
+              <a:ext uri="{FF2B5EF4-FFF2-40B4-BE49-F238E27FC236}">
+                <a16:creationId xmlns:a16="http://schemas.microsoft.com/office/drawing/2014/main" id="{18299F34-6385-6CAD-AC6B-59DF96B9DB1D}"/>
+              </a:ext>
+            </a:extLst>
+          </p:cNvPr>
+          <p:cNvSpPr/>
+          <p:nvPr/>
+        </p:nvSpPr>
+        <p:spPr>
+          <a:xfrm>
+            <a:off x="4890789" y="4469319"/>
+            <a:ext cx="2702504" cy="2597849"/>
+          </a:xfrm>
+          <a:prstGeom prst="ellipse">
+            <a:avLst/>
+          </a:prstGeom>
+          <a:ln>
+            <a:solidFill>
+              <a:schemeClr val="bg1">
+                <a:lumMod val="85000"/>
+              </a:schemeClr>
+            </a:solidFill>
+            <a:prstDash val="dash"/>
+          </a:ln>
+        </p:spPr>
+        <p:style>
+          <a:lnRef idx="2">
+            <a:schemeClr val="accent1"/>
+          </a:lnRef>
+          <a:fillRef idx="0">
+            <a:schemeClr val="accent1"/>
+          </a:fillRef>
+          <a:effectRef idx="1">
+            <a:schemeClr val="accent1"/>
+          </a:effectRef>
+          <a:fontRef idx="minor">
+            <a:schemeClr val="tx1"/>
+          </a:fontRef>
+        </p:style>
+        <p:txBody>
+          <a:bodyPr rtlCol="0" anchor="ctr"/>
+          <a:lstStyle/>
+          <a:p>
+            <a:pPr algn="ctr"/>
+            <a:endParaRPr lang="ko-KR" altLang="en-US"/>
+          </a:p>
+        </p:txBody>
+      </p:sp>
+      <p:sp>
+        <p:nvSpPr>
+          <p:cNvPr id="18" name="직사각형 17">
+            <a:extLst>
+              <a:ext uri="{FF2B5EF4-FFF2-40B4-BE49-F238E27FC236}">
+                <a16:creationId xmlns:a16="http://schemas.microsoft.com/office/drawing/2014/main" id="{C1BB0D87-D596-F3F3-0908-3D206E73F043}"/>
+              </a:ext>
+            </a:extLst>
+          </p:cNvPr>
+          <p:cNvSpPr/>
+          <p:nvPr/>
+        </p:nvSpPr>
+        <p:spPr>
+          <a:xfrm>
+            <a:off x="4794241" y="5884474"/>
+            <a:ext cx="2900515" cy="1257356"/>
+          </a:xfrm>
+          <a:prstGeom prst="rect">
+            <a:avLst/>
+          </a:prstGeom>
+          <a:solidFill>
+            <a:schemeClr val="bg1"/>
+          </a:solidFill>
+          <a:ln>
+            <a:solidFill>
+              <a:schemeClr val="bg1"/>
+            </a:solidFill>
+          </a:ln>
+        </p:spPr>
+        <p:style>
+          <a:lnRef idx="2">
+            <a:schemeClr val="accent1">
+              <a:shade val="15000"/>
+            </a:schemeClr>
+          </a:lnRef>
+          <a:fillRef idx="1">
+            <a:schemeClr val="accent1"/>
+          </a:fillRef>
+          <a:effectRef idx="0">
+            <a:schemeClr val="accent1"/>
+          </a:effectRef>
+          <a:fontRef idx="minor">
+            <a:schemeClr val="lt1"/>
+          </a:fontRef>
+        </p:style>
+        <p:txBody>
+          <a:bodyPr rtlCol="0" anchor="ctr"/>
+          <a:lstStyle/>
+          <a:p>
+            <a:pPr algn="ctr"/>
+            <a:endParaRPr lang="ko-KR" altLang="en-US">
+              <a:ln>
+                <a:solidFill>
+                  <a:schemeClr val="bg1"/>
+                </a:solidFill>
+              </a:ln>
+              <a:solidFill>
+                <a:schemeClr val="bg1"/>
+              </a:solidFill>
+            </a:endParaRPr>
+          </a:p>
+        </p:txBody>
+      </p:sp>
+      <p:sp>
+        <p:nvSpPr>
+          <p:cNvPr id="27" name="TextBox 26">
+            <a:extLst>
+              <a:ext uri="{FF2B5EF4-FFF2-40B4-BE49-F238E27FC236}">
+                <a16:creationId xmlns:a16="http://schemas.microsoft.com/office/drawing/2014/main" id="{7E735544-6F6A-74E4-FE70-8FC423435405}"/>
+              </a:ext>
+            </a:extLst>
+          </p:cNvPr>
+          <p:cNvSpPr txBox="1"/>
+          <p:nvPr/>
+        </p:nvSpPr>
+        <p:spPr>
+          <a:xfrm>
+            <a:off x="5515720" y="5985246"/>
+            <a:ext cx="1367362" cy="307777"/>
+          </a:xfrm>
+          <a:prstGeom prst="rect">
+            <a:avLst/>
+          </a:prstGeom>
+          <a:noFill/>
+        </p:spPr>
+        <p:txBody>
+          <a:bodyPr wrap="none" rtlCol="0">
+            <a:spAutoFit/>
+          </a:bodyPr>
+          <a:lstStyle/>
+          <a:p>
+            <a:r>
+              <a:rPr lang="en-US" altLang="ko-KR" sz="1400" b="1">
+                <a:solidFill>
+                  <a:srgbClr val="0070C0"/>
+                </a:solidFill>
+              </a:rPr>
+              <a:t>Domain </a:t>
+            </a:r>
+            <a:r>
+              <a:rPr lang="en-GB" altLang="ko-KR" sz="1400" b="1">
+                <a:solidFill>
+                  <a:srgbClr val="0070C0"/>
+                </a:solidFill>
+              </a:rPr>
+              <a:t>Layer</a:t>
+            </a:r>
+            <a:endParaRPr lang="ko-KR" altLang="en-US" sz="1400" b="1">
+              <a:solidFill>
+                <a:srgbClr val="0070C0"/>
+              </a:solidFill>
+            </a:endParaRPr>
+          </a:p>
+        </p:txBody>
+      </p:sp>
+      <p:sp>
+        <p:nvSpPr>
+          <p:cNvPr id="29" name="사각형: 둥근 모서리 28">
+            <a:extLst>
+              <a:ext uri="{FF2B5EF4-FFF2-40B4-BE49-F238E27FC236}">
+                <a16:creationId xmlns:a16="http://schemas.microsoft.com/office/drawing/2014/main" id="{427FDB2B-312C-7E5E-0FF2-F9E25325785E}"/>
+              </a:ext>
+            </a:extLst>
+          </p:cNvPr>
+          <p:cNvSpPr/>
+          <p:nvPr/>
+        </p:nvSpPr>
+        <p:spPr>
+          <a:xfrm>
+            <a:off x="1445340" y="2665771"/>
+            <a:ext cx="188018" cy="1582993"/>
+          </a:xfrm>
+          <a:prstGeom prst="roundRect">
+            <a:avLst/>
+          </a:prstGeom>
+        </p:spPr>
+        <p:style>
+          <a:lnRef idx="2">
+            <a:schemeClr val="accent1">
+              <a:shade val="15000"/>
+            </a:schemeClr>
+          </a:lnRef>
+          <a:fillRef idx="1">
+            <a:schemeClr val="accent1"/>
+          </a:fillRef>
+          <a:effectRef idx="0">
+            <a:schemeClr val="accent1"/>
+          </a:effectRef>
+          <a:fontRef idx="minor">
+            <a:schemeClr val="lt1"/>
+          </a:fontRef>
+        </p:style>
+        <p:txBody>
+          <a:bodyPr rtlCol="0" anchor="ctr"/>
+          <a:lstStyle/>
+          <a:p>
+            <a:pPr algn="ctr"/>
+            <a:endParaRPr lang="ko-KR" altLang="en-US"/>
+          </a:p>
+        </p:txBody>
+      </p:sp>
+      <p:sp>
+        <p:nvSpPr>
+          <p:cNvPr id="32" name="사각형: 둥근 모서리 31">
+            <a:extLst>
+              <a:ext uri="{FF2B5EF4-FFF2-40B4-BE49-F238E27FC236}">
+                <a16:creationId xmlns:a16="http://schemas.microsoft.com/office/drawing/2014/main" id="{9FADE76B-6282-5D15-AD98-D97595982936}"/>
+              </a:ext>
+            </a:extLst>
+          </p:cNvPr>
+          <p:cNvSpPr/>
+          <p:nvPr/>
+        </p:nvSpPr>
+        <p:spPr>
+          <a:xfrm>
+            <a:off x="5178618" y="2665771"/>
+            <a:ext cx="188018" cy="1582993"/>
+          </a:xfrm>
+          <a:prstGeom prst="roundRect">
+            <a:avLst/>
+          </a:prstGeom>
+          <a:solidFill>
+            <a:schemeClr val="accent2">
+              <a:lumMod val="20000"/>
+              <a:lumOff val="80000"/>
+            </a:schemeClr>
+          </a:solidFill>
+          <a:ln>
+            <a:solidFill>
+              <a:srgbClr val="C00000"/>
+            </a:solidFill>
+          </a:ln>
+        </p:spPr>
+        <p:style>
+          <a:lnRef idx="2">
+            <a:schemeClr val="accent1">
+              <a:shade val="15000"/>
+            </a:schemeClr>
+          </a:lnRef>
+          <a:fillRef idx="1">
+            <a:schemeClr val="accent1"/>
+          </a:fillRef>
+          <a:effectRef idx="0">
+            <a:schemeClr val="accent1"/>
+          </a:effectRef>
+          <a:fontRef idx="minor">
+            <a:schemeClr val="lt1"/>
+          </a:fontRef>
+        </p:style>
+        <p:txBody>
+          <a:bodyPr rtlCol="0" anchor="ctr"/>
+          <a:lstStyle/>
+          <a:p>
+            <a:pPr algn="ctr"/>
+            <a:endParaRPr lang="ko-KR" altLang="en-US"/>
+          </a:p>
+        </p:txBody>
+      </p:sp>
+      <p:sp>
+        <p:nvSpPr>
+          <p:cNvPr id="33" name="사각형: 둥근 모서리 32">
+            <a:extLst>
+              <a:ext uri="{FF2B5EF4-FFF2-40B4-BE49-F238E27FC236}">
+                <a16:creationId xmlns:a16="http://schemas.microsoft.com/office/drawing/2014/main" id="{B3B710AF-5251-578E-C64F-BDB5452C63B8}"/>
+              </a:ext>
+            </a:extLst>
+          </p:cNvPr>
+          <p:cNvSpPr/>
+          <p:nvPr/>
+        </p:nvSpPr>
+        <p:spPr>
+          <a:xfrm>
+            <a:off x="8560423" y="2665771"/>
+            <a:ext cx="188018" cy="1582993"/>
+          </a:xfrm>
+          <a:prstGeom prst="roundRect">
+            <a:avLst/>
+          </a:prstGeom>
+          <a:solidFill>
+            <a:schemeClr val="accent2">
+              <a:lumMod val="20000"/>
+              <a:lumOff val="80000"/>
+            </a:schemeClr>
+          </a:solidFill>
+          <a:ln>
+            <a:solidFill>
+              <a:srgbClr val="C00000"/>
+            </a:solidFill>
+          </a:ln>
+        </p:spPr>
+        <p:style>
+          <a:lnRef idx="2">
+            <a:schemeClr val="accent1">
+              <a:shade val="15000"/>
+            </a:schemeClr>
+          </a:lnRef>
+          <a:fillRef idx="1">
+            <a:schemeClr val="accent1"/>
+          </a:fillRef>
+          <a:effectRef idx="0">
+            <a:schemeClr val="accent1"/>
+          </a:effectRef>
+          <a:fontRef idx="minor">
+            <a:schemeClr val="lt1"/>
+          </a:fontRef>
+        </p:style>
+        <p:txBody>
+          <a:bodyPr rtlCol="0" anchor="ctr"/>
+          <a:lstStyle/>
+          <a:p>
+            <a:pPr algn="ctr"/>
+            <a:endParaRPr lang="ko-KR" altLang="en-US"/>
+          </a:p>
+        </p:txBody>
+      </p:sp>
+      <p:sp>
+        <p:nvSpPr>
+          <p:cNvPr id="39" name="사각형: 둥근 모서리 38">
+            <a:extLst>
+              <a:ext uri="{FF2B5EF4-FFF2-40B4-BE49-F238E27FC236}">
+                <a16:creationId xmlns:a16="http://schemas.microsoft.com/office/drawing/2014/main" id="{E1A9C31F-063C-3C37-BE35-E1763A3E13B2}"/>
+              </a:ext>
+            </a:extLst>
+          </p:cNvPr>
+          <p:cNvSpPr/>
+          <p:nvPr/>
+        </p:nvSpPr>
+        <p:spPr>
+          <a:xfrm>
+            <a:off x="10962011" y="2665771"/>
+            <a:ext cx="188018" cy="1582993"/>
+          </a:xfrm>
+          <a:prstGeom prst="roundRect">
+            <a:avLst/>
+          </a:prstGeom>
+        </p:spPr>
+        <p:style>
+          <a:lnRef idx="2">
+            <a:schemeClr val="accent1">
+              <a:shade val="15000"/>
+            </a:schemeClr>
+          </a:lnRef>
+          <a:fillRef idx="1">
+            <a:schemeClr val="accent1"/>
+          </a:fillRef>
+          <a:effectRef idx="0">
+            <a:schemeClr val="accent1"/>
+          </a:effectRef>
+          <a:fontRef idx="minor">
+            <a:schemeClr val="lt1"/>
+          </a:fontRef>
+        </p:style>
+        <p:txBody>
+          <a:bodyPr rtlCol="0" anchor="ctr"/>
+          <a:lstStyle/>
+          <a:p>
+            <a:pPr algn="ctr"/>
+            <a:endParaRPr lang="ko-KR" altLang="en-US"/>
+          </a:p>
+        </p:txBody>
+      </p:sp>
+      <p:sp>
+        <p:nvSpPr>
+          <p:cNvPr id="40" name="사각형: 둥근 모서리 39">
+            <a:extLst>
+              <a:ext uri="{FF2B5EF4-FFF2-40B4-BE49-F238E27FC236}">
+                <a16:creationId xmlns:a16="http://schemas.microsoft.com/office/drawing/2014/main" id="{F6943E91-D213-8CE0-84A7-6AED65B4FBA4}"/>
+              </a:ext>
+            </a:extLst>
+          </p:cNvPr>
+          <p:cNvSpPr/>
+          <p:nvPr/>
+        </p:nvSpPr>
+        <p:spPr>
+          <a:xfrm rot="16200000">
+            <a:off x="6138200" y="4355776"/>
+            <a:ext cx="188018" cy="936000"/>
+          </a:xfrm>
+          <a:prstGeom prst="roundRect">
+            <a:avLst/>
+          </a:prstGeom>
+          <a:solidFill>
+            <a:schemeClr val="accent2">
+              <a:lumMod val="20000"/>
+              <a:lumOff val="80000"/>
+            </a:schemeClr>
+          </a:solidFill>
+          <a:ln>
+            <a:solidFill>
+              <a:srgbClr val="C00000"/>
+            </a:solidFill>
+            <a:prstDash val="dash"/>
+          </a:ln>
+        </p:spPr>
+        <p:style>
+          <a:lnRef idx="2">
+            <a:schemeClr val="accent1">
+              <a:shade val="15000"/>
+            </a:schemeClr>
+          </a:lnRef>
+          <a:fillRef idx="1">
+            <a:schemeClr val="accent1"/>
+          </a:fillRef>
+          <a:effectRef idx="0">
+            <a:schemeClr val="accent1"/>
+          </a:effectRef>
+          <a:fontRef idx="minor">
+            <a:schemeClr val="lt1"/>
+          </a:fontRef>
+        </p:style>
+        <p:txBody>
+          <a:bodyPr rtlCol="0" anchor="ctr"/>
+          <a:lstStyle/>
+          <a:p>
+            <a:pPr algn="ctr"/>
+            <a:endParaRPr lang="ko-KR" altLang="en-US">
+              <a:ln>
+                <a:solidFill>
+                  <a:schemeClr val="tx1"/>
+                </a:solidFill>
+                <a:prstDash val="dash"/>
+              </a:ln>
+            </a:endParaRPr>
+          </a:p>
+        </p:txBody>
+      </p:sp>
+      <p:sp>
+        <p:nvSpPr>
+          <p:cNvPr id="41" name="TextBox 40">
+            <a:extLst>
+              <a:ext uri="{FF2B5EF4-FFF2-40B4-BE49-F238E27FC236}">
+                <a16:creationId xmlns:a16="http://schemas.microsoft.com/office/drawing/2014/main" id="{2B0CA7C8-F31C-20FA-CC65-B2B352DB5D46}"/>
+              </a:ext>
+            </a:extLst>
+          </p:cNvPr>
+          <p:cNvSpPr txBox="1"/>
+          <p:nvPr/>
+        </p:nvSpPr>
+        <p:spPr>
+          <a:xfrm>
+            <a:off x="460915" y="4570156"/>
+            <a:ext cx="1314719" cy="307777"/>
+          </a:xfrm>
+          <a:prstGeom prst="rect">
+            <a:avLst/>
+          </a:prstGeom>
+          <a:noFill/>
+        </p:spPr>
+        <p:txBody>
+          <a:bodyPr wrap="none" rtlCol="0">
+            <a:spAutoFit/>
+          </a:bodyPr>
+          <a:lstStyle/>
+          <a:p>
+            <a:r>
+              <a:rPr lang="en-GB" altLang="ko-KR" sz="1400" b="1"/>
+              <a:t>Observability</a:t>
+            </a:r>
+            <a:endParaRPr lang="ko-KR" altLang="en-US" sz="1400" b="1"/>
+          </a:p>
+        </p:txBody>
+      </p:sp>
+      <p:sp>
+        <p:nvSpPr>
+          <p:cNvPr id="42" name="사각형: 둥근 모서리 41">
+            <a:extLst>
+              <a:ext uri="{FF2B5EF4-FFF2-40B4-BE49-F238E27FC236}">
+                <a16:creationId xmlns:a16="http://schemas.microsoft.com/office/drawing/2014/main" id="{56154BD1-16B4-7748-E050-19C1CAFB5E24}"/>
+              </a:ext>
+            </a:extLst>
+          </p:cNvPr>
+          <p:cNvSpPr/>
+          <p:nvPr/>
+        </p:nvSpPr>
+        <p:spPr>
+          <a:xfrm>
+            <a:off x="616570" y="5016111"/>
+            <a:ext cx="289851" cy="236170"/>
+          </a:xfrm>
+          <a:prstGeom prst="roundRect">
+            <a:avLst/>
+          </a:prstGeom>
+        </p:spPr>
+        <p:style>
+          <a:lnRef idx="2">
+            <a:schemeClr val="accent1">
+              <a:shade val="15000"/>
+            </a:schemeClr>
+          </a:lnRef>
+          <a:fillRef idx="1">
+            <a:schemeClr val="accent1"/>
+          </a:fillRef>
+          <a:effectRef idx="0">
+            <a:schemeClr val="accent1"/>
+          </a:effectRef>
+          <a:fontRef idx="minor">
+            <a:schemeClr val="lt1"/>
+          </a:fontRef>
+        </p:style>
+        <p:txBody>
+          <a:bodyPr rtlCol="0" anchor="ctr"/>
+          <a:lstStyle/>
+          <a:p>
+            <a:pPr algn="ctr"/>
+            <a:endParaRPr lang="ko-KR" altLang="en-US"/>
+          </a:p>
+        </p:txBody>
+      </p:sp>
+      <p:sp>
+        <p:nvSpPr>
+          <p:cNvPr id="43" name="사각형: 둥근 모서리 42">
+            <a:extLst>
+              <a:ext uri="{FF2B5EF4-FFF2-40B4-BE49-F238E27FC236}">
+                <a16:creationId xmlns:a16="http://schemas.microsoft.com/office/drawing/2014/main" id="{34434E2B-550E-6470-C313-6FB32359B975}"/>
+              </a:ext>
+            </a:extLst>
+          </p:cNvPr>
+          <p:cNvSpPr/>
+          <p:nvPr/>
+        </p:nvSpPr>
+        <p:spPr>
+          <a:xfrm>
+            <a:off x="616570" y="5377436"/>
+            <a:ext cx="289851" cy="236170"/>
+          </a:xfrm>
+          <a:prstGeom prst="roundRect">
+            <a:avLst/>
+          </a:prstGeom>
+          <a:solidFill>
+            <a:schemeClr val="accent2">
+              <a:lumMod val="20000"/>
+              <a:lumOff val="80000"/>
+            </a:schemeClr>
+          </a:solidFill>
+          <a:ln>
+            <a:solidFill>
+              <a:srgbClr val="C00000"/>
+            </a:solidFill>
+          </a:ln>
+        </p:spPr>
+        <p:style>
+          <a:lnRef idx="2">
+            <a:schemeClr val="accent1">
+              <a:shade val="15000"/>
+            </a:schemeClr>
+          </a:lnRef>
+          <a:fillRef idx="1">
+            <a:schemeClr val="accent1"/>
+          </a:fillRef>
+          <a:effectRef idx="0">
+            <a:schemeClr val="accent1"/>
+          </a:effectRef>
+          <a:fontRef idx="minor">
+            <a:schemeClr val="lt1"/>
+          </a:fontRef>
+        </p:style>
+        <p:txBody>
+          <a:bodyPr rtlCol="0" anchor="ctr"/>
+          <a:lstStyle/>
+          <a:p>
+            <a:pPr algn="ctr"/>
+            <a:endParaRPr lang="ko-KR" altLang="en-US"/>
+          </a:p>
+        </p:txBody>
+      </p:sp>
+      <p:sp>
+        <p:nvSpPr>
+          <p:cNvPr id="44" name="사각형: 둥근 모서리 43">
+            <a:extLst>
+              <a:ext uri="{FF2B5EF4-FFF2-40B4-BE49-F238E27FC236}">
+                <a16:creationId xmlns:a16="http://schemas.microsoft.com/office/drawing/2014/main" id="{B4942D3D-5C5A-9008-D6FF-0BA54515D5A5}"/>
+              </a:ext>
+            </a:extLst>
+          </p:cNvPr>
+          <p:cNvSpPr/>
+          <p:nvPr/>
+        </p:nvSpPr>
+        <p:spPr>
+          <a:xfrm>
+            <a:off x="616570" y="5728661"/>
+            <a:ext cx="289851" cy="236170"/>
+          </a:xfrm>
+          <a:prstGeom prst="roundRect">
+            <a:avLst/>
+          </a:prstGeom>
+          <a:solidFill>
+            <a:schemeClr val="accent2">
+              <a:lumMod val="20000"/>
+              <a:lumOff val="80000"/>
+            </a:schemeClr>
+          </a:solidFill>
+          <a:ln>
+            <a:solidFill>
+              <a:srgbClr val="C00000"/>
+            </a:solidFill>
+            <a:prstDash val="dash"/>
+          </a:ln>
+        </p:spPr>
+        <p:style>
+          <a:lnRef idx="2">
+            <a:schemeClr val="accent1">
+              <a:shade val="15000"/>
+            </a:schemeClr>
+          </a:lnRef>
+          <a:fillRef idx="1">
+            <a:schemeClr val="accent1"/>
+          </a:fillRef>
+          <a:effectRef idx="0">
+            <a:schemeClr val="accent1"/>
+          </a:effectRef>
+          <a:fontRef idx="minor">
+            <a:schemeClr val="lt1"/>
+          </a:fontRef>
+        </p:style>
+        <p:txBody>
+          <a:bodyPr rtlCol="0" anchor="ctr"/>
+          <a:lstStyle/>
+          <a:p>
+            <a:pPr algn="ctr"/>
+            <a:endParaRPr lang="ko-KR" altLang="en-US">
+              <a:ln>
+                <a:solidFill>
+                  <a:schemeClr val="tx1"/>
+                </a:solidFill>
+                <a:prstDash val="dash"/>
+              </a:ln>
+            </a:endParaRPr>
+          </a:p>
+        </p:txBody>
+      </p:sp>
+      <p:sp>
+        <p:nvSpPr>
+          <p:cNvPr id="45" name="TextBox 44">
+            <a:extLst>
+              <a:ext uri="{FF2B5EF4-FFF2-40B4-BE49-F238E27FC236}">
+                <a16:creationId xmlns:a16="http://schemas.microsoft.com/office/drawing/2014/main" id="{B048C73E-58E3-3CB0-B2FA-C84FDD300391}"/>
+              </a:ext>
+            </a:extLst>
+          </p:cNvPr>
+          <p:cNvSpPr txBox="1"/>
+          <p:nvPr/>
+        </p:nvSpPr>
+        <p:spPr>
+          <a:xfrm>
+            <a:off x="1046383" y="5016111"/>
+            <a:ext cx="4026359" cy="276999"/>
+          </a:xfrm>
+          <a:prstGeom prst="rect">
+            <a:avLst/>
+          </a:prstGeom>
+          <a:noFill/>
+        </p:spPr>
+        <p:txBody>
+          <a:bodyPr wrap="none" rtlCol="0">
+            <a:spAutoFit/>
+          </a:bodyPr>
+          <a:lstStyle/>
+          <a:p>
+            <a:r>
+              <a:rPr lang="en-GB" sz="1200"/>
+              <a:t>No implementation required: provided by the package</a:t>
+            </a:r>
+            <a:endParaRPr lang="ko-KR" altLang="en-US" sz="1200"/>
+          </a:p>
+        </p:txBody>
+      </p:sp>
+      <p:sp>
+        <p:nvSpPr>
+          <p:cNvPr id="46" name="TextBox 45">
+            <a:extLst>
+              <a:ext uri="{FF2B5EF4-FFF2-40B4-BE49-F238E27FC236}">
+                <a16:creationId xmlns:a16="http://schemas.microsoft.com/office/drawing/2014/main" id="{21ECD4BD-4102-9A0B-EDC3-D252D7625995}"/>
+              </a:ext>
+            </a:extLst>
+          </p:cNvPr>
+          <p:cNvSpPr txBox="1"/>
+          <p:nvPr/>
+        </p:nvSpPr>
+        <p:spPr>
+          <a:xfrm>
+            <a:off x="1046383" y="5369033"/>
+            <a:ext cx="1954831" cy="276999"/>
+          </a:xfrm>
+          <a:prstGeom prst="rect">
+            <a:avLst/>
+          </a:prstGeom>
+          <a:noFill/>
+        </p:spPr>
+        <p:txBody>
+          <a:bodyPr wrap="none" rtlCol="0">
+            <a:spAutoFit/>
+          </a:bodyPr>
+          <a:lstStyle/>
+          <a:p>
+            <a:r>
+              <a:rPr lang="en-GB" sz="1200"/>
+              <a:t>implementation required</a:t>
+            </a:r>
+            <a:endParaRPr lang="ko-KR" altLang="en-US" sz="1200"/>
+          </a:p>
+        </p:txBody>
+      </p:sp>
+      <p:sp>
+        <p:nvSpPr>
+          <p:cNvPr id="47" name="TextBox 46">
+            <a:extLst>
+              <a:ext uri="{FF2B5EF4-FFF2-40B4-BE49-F238E27FC236}">
+                <a16:creationId xmlns:a16="http://schemas.microsoft.com/office/drawing/2014/main" id="{AA1DAF0B-41D4-4020-8EA6-6AD3337C9938}"/>
+              </a:ext>
+            </a:extLst>
+          </p:cNvPr>
+          <p:cNvSpPr txBox="1"/>
+          <p:nvPr/>
+        </p:nvSpPr>
+        <p:spPr>
+          <a:xfrm>
+            <a:off x="1046383" y="5708247"/>
+            <a:ext cx="2995179" cy="276999"/>
+          </a:xfrm>
+          <a:prstGeom prst="rect">
+            <a:avLst/>
+          </a:prstGeom>
+          <a:noFill/>
+        </p:spPr>
+        <p:txBody>
+          <a:bodyPr wrap="none" rtlCol="0">
+            <a:spAutoFit/>
+          </a:bodyPr>
+          <a:lstStyle/>
+          <a:p>
+            <a:r>
+              <a:rPr lang="en-GB" sz="1200"/>
+              <a:t>No implementation required: Functional</a:t>
+            </a:r>
+            <a:endParaRPr lang="ko-KR" altLang="en-US" sz="1200"/>
+          </a:p>
+        </p:txBody>
+      </p:sp>
+    </p:spTree>
+    <p:extLst>
+      <p:ext uri="{BB962C8B-B14F-4D97-AF65-F5344CB8AC3E}">
+        <p14:creationId xmlns:p14="http://schemas.microsoft.com/office/powerpoint/2010/main" val="1427290537"/>
+      </p:ext>
+    </p:extLst>
+  </p:cSld>
+  <p:clrMapOvr>
+    <a:masterClrMapping/>
+  </p:clrMapOvr>
+</p:sld>
+</file>
+
+<file path=ppt/slides/slide11.xml><?xml version="1.0" encoding="utf-8"?>
 <p:sld xmlns:a="http://schemas.openxmlformats.org/drawingml/2006/main" xmlns:r="http://schemas.openxmlformats.org/officeDocument/2006/relationships" xmlns:p="http://schemas.openxmlformats.org/presentationml/2006/main">
   <p:cSld>
     <p:spTree>
@@ -4397,7 +5725,7 @@
 </p:sld>
 </file>
 
-<file path=ppt/slides/slide11.xml><?xml version="1.0" encoding="utf-8"?>
+<file path=ppt/slides/slide12.xml><?xml version="1.0" encoding="utf-8"?>
 <p:sld xmlns:a="http://schemas.openxmlformats.org/drawingml/2006/main" xmlns:r="http://schemas.openxmlformats.org/officeDocument/2006/relationships" xmlns:p="http://schemas.openxmlformats.org/presentationml/2006/main">
   <p:cSld>
     <p:spTree>
@@ -4579,7 +5907,7 @@
 </p:sld>
 </file>
 
-<file path=ppt/slides/slide12.xml><?xml version="1.0" encoding="utf-8"?>
+<file path=ppt/slides/slide13.xml><?xml version="1.0" encoding="utf-8"?>
 <p:sld xmlns:a="http://schemas.openxmlformats.org/drawingml/2006/main" xmlns:r="http://schemas.openxmlformats.org/officeDocument/2006/relationships" xmlns:p="http://schemas.openxmlformats.org/presentationml/2006/main">
   <p:cSld>
     <p:spTree>
@@ -9534,7 +10862,7 @@
         <p:cNvPr id="1" name="">
           <a:extLst>
             <a:ext uri="{FF2B5EF4-FFF2-40B4-BE49-F238E27FC236}">
-              <a16:creationId xmlns:a16="http://schemas.microsoft.com/office/drawing/2014/main" id="{FD307D2A-CD3A-F455-9B05-D137C73FFFC1}"/>
+              <a16:creationId xmlns:a16="http://schemas.microsoft.com/office/drawing/2014/main" id="{FC601FC2-92D2-B9C5-4B3E-BBC405DAF899}"/>
             </a:ext>
           </a:extLst>
         </p:cNvPr>
@@ -9549,12 +10877,64 @@
           <a:chExt cx="0" cy="0"/>
         </a:xfrm>
       </p:grpSpPr>
+      <p:sp>
+        <p:nvSpPr>
+          <p:cNvPr id="14" name="타원 13">
+            <a:extLst>
+              <a:ext uri="{FF2B5EF4-FFF2-40B4-BE49-F238E27FC236}">
+                <a16:creationId xmlns:a16="http://schemas.microsoft.com/office/drawing/2014/main" id="{F75B497B-7491-C46F-7306-257B4AA4314C}"/>
+              </a:ext>
+            </a:extLst>
+          </p:cNvPr>
+          <p:cNvSpPr/>
+          <p:nvPr/>
+        </p:nvSpPr>
+        <p:spPr>
+          <a:xfrm>
+            <a:off x="4890789" y="4469319"/>
+            <a:ext cx="2702504" cy="2597849"/>
+          </a:xfrm>
+          <a:prstGeom prst="ellipse">
+            <a:avLst/>
+          </a:prstGeom>
+          <a:ln>
+            <a:solidFill>
+              <a:schemeClr val="bg1">
+                <a:lumMod val="85000"/>
+              </a:schemeClr>
+            </a:solidFill>
+            <a:prstDash val="dash"/>
+          </a:ln>
+        </p:spPr>
+        <p:style>
+          <a:lnRef idx="2">
+            <a:schemeClr val="accent1"/>
+          </a:lnRef>
+          <a:fillRef idx="0">
+            <a:schemeClr val="accent1"/>
+          </a:fillRef>
+          <a:effectRef idx="1">
+            <a:schemeClr val="accent1"/>
+          </a:effectRef>
+          <a:fontRef idx="minor">
+            <a:schemeClr val="tx1"/>
+          </a:fontRef>
+        </p:style>
+        <p:txBody>
+          <a:bodyPr rtlCol="0" anchor="ctr"/>
+          <a:lstStyle/>
+          <a:p>
+            <a:pPr algn="ctr"/>
+            <a:endParaRPr lang="ko-KR" altLang="en-US"/>
+          </a:p>
+        </p:txBody>
+      </p:sp>
       <p:grpSp>
         <p:nvGrpSpPr>
-          <p:cNvPr id="8" name="그룹 7">
-            <a:extLst>
-              <a:ext uri="{FF2B5EF4-FFF2-40B4-BE49-F238E27FC236}">
-                <a16:creationId xmlns:a16="http://schemas.microsoft.com/office/drawing/2014/main" id="{8E566107-522F-E21F-58F7-AD498C8135E3}"/>
+          <p:cNvPr id="9" name="그룹 8">
+            <a:extLst>
+              <a:ext uri="{FF2B5EF4-FFF2-40B4-BE49-F238E27FC236}">
+                <a16:creationId xmlns:a16="http://schemas.microsoft.com/office/drawing/2014/main" id="{30ABA8A4-767A-B2D1-DFB8-48E382D56491}"/>
               </a:ext>
             </a:extLst>
           </p:cNvPr>
@@ -9563,99 +10943,367 @@
         </p:nvGrpSpPr>
         <p:grpSpPr>
           <a:xfrm>
-            <a:off x="1886918" y="2952054"/>
-            <a:ext cx="8862646" cy="1214438"/>
-            <a:chOff x="2476500" y="2557462"/>
-            <a:chExt cx="7159625" cy="981075"/>
+            <a:off x="1111179" y="312658"/>
+            <a:ext cx="10480528" cy="6283599"/>
+            <a:chOff x="1069966" y="414258"/>
+            <a:chExt cx="10480528" cy="6283599"/>
           </a:xfrm>
         </p:grpSpPr>
-        <p:pic>
-          <p:nvPicPr>
-            <p:cNvPr id="5" name="그림 4">
+        <p:grpSp>
+          <p:nvGrpSpPr>
+            <p:cNvPr id="8" name="그룹 7">
               <a:extLst>
                 <a:ext uri="{FF2B5EF4-FFF2-40B4-BE49-F238E27FC236}">
-                  <a16:creationId xmlns:a16="http://schemas.microsoft.com/office/drawing/2014/main" id="{CB5BE4BC-C2BF-5A34-604A-D69E297E3903}"/>
+                  <a16:creationId xmlns:a16="http://schemas.microsoft.com/office/drawing/2014/main" id="{29FBFE93-4EBE-85F6-0CC9-061083282764}"/>
                 </a:ext>
               </a:extLst>
             </p:cNvPr>
-            <p:cNvPicPr>
-              <a:picLocks noChangeAspect="1"/>
-            </p:cNvPicPr>
+            <p:cNvGrpSpPr/>
             <p:nvPr/>
-          </p:nvPicPr>
-          <p:blipFill>
-            <a:blip r:embed="rId2"/>
-            <a:stretch>
-              <a:fillRect/>
-            </a:stretch>
-          </p:blipFill>
+          </p:nvGrpSpPr>
+          <p:grpSpPr>
+            <a:xfrm>
+              <a:off x="1886918" y="2952054"/>
+              <a:ext cx="8862646" cy="1214438"/>
+              <a:chOff x="2476500" y="2557462"/>
+              <a:chExt cx="7159625" cy="981075"/>
+            </a:xfrm>
+          </p:grpSpPr>
+          <p:pic>
+            <p:nvPicPr>
+              <p:cNvPr id="5" name="그림 4">
+                <a:extLst>
+                  <a:ext uri="{FF2B5EF4-FFF2-40B4-BE49-F238E27FC236}">
+                    <a16:creationId xmlns:a16="http://schemas.microsoft.com/office/drawing/2014/main" id="{0DEEA421-8C55-5E07-24EA-5807E6AC039C}"/>
+                  </a:ext>
+                </a:extLst>
+              </p:cNvPr>
+              <p:cNvPicPr>
+                <a:picLocks noChangeAspect="1"/>
+              </p:cNvPicPr>
+              <p:nvPr/>
+            </p:nvPicPr>
+            <p:blipFill>
+              <a:blip r:embed="rId2"/>
+              <a:stretch>
+                <a:fillRect/>
+              </a:stretch>
+            </p:blipFill>
+            <p:spPr>
+              <a:xfrm>
+                <a:off x="2476500" y="2557462"/>
+                <a:ext cx="4257675" cy="981075"/>
+              </a:xfrm>
+              <a:prstGeom prst="rect">
+                <a:avLst/>
+              </a:prstGeom>
+            </p:spPr>
+          </p:pic>
+          <p:pic>
+            <p:nvPicPr>
+              <p:cNvPr id="7" name="그림 6">
+                <a:extLst>
+                  <a:ext uri="{FF2B5EF4-FFF2-40B4-BE49-F238E27FC236}">
+                    <a16:creationId xmlns:a16="http://schemas.microsoft.com/office/drawing/2014/main" id="{8769B09C-7A5B-D282-E29D-191084964936}"/>
+                  </a:ext>
+                </a:extLst>
+              </p:cNvPr>
+              <p:cNvPicPr>
+                <a:picLocks noChangeAspect="1"/>
+              </p:cNvPicPr>
+              <p:nvPr/>
+            </p:nvPicPr>
+            <p:blipFill>
+              <a:blip r:embed="rId3"/>
+              <a:stretch>
+                <a:fillRect/>
+              </a:stretch>
+            </p:blipFill>
+            <p:spPr>
+              <a:xfrm>
+                <a:off x="6588125" y="2563812"/>
+                <a:ext cx="3048000" cy="904875"/>
+              </a:xfrm>
+              <a:prstGeom prst="rect">
+                <a:avLst/>
+              </a:prstGeom>
+            </p:spPr>
+          </p:pic>
+        </p:grpSp>
+        <p:grpSp>
+          <p:nvGrpSpPr>
+            <p:cNvPr id="37" name="그룹 36">
+              <a:extLst>
+                <a:ext uri="{FF2B5EF4-FFF2-40B4-BE49-F238E27FC236}">
+                  <a16:creationId xmlns:a16="http://schemas.microsoft.com/office/drawing/2014/main" id="{960E446E-FFC8-5CCD-E9D6-B6F70ECF584E}"/>
+                </a:ext>
+              </a:extLst>
+            </p:cNvPr>
+            <p:cNvGrpSpPr/>
+            <p:nvPr/>
+          </p:nvGrpSpPr>
+          <p:grpSpPr>
+            <a:xfrm>
+              <a:off x="4679941" y="414258"/>
+              <a:ext cx="3124200" cy="5611719"/>
+              <a:chOff x="4679941" y="414259"/>
+              <a:chExt cx="3124200" cy="5470214"/>
+            </a:xfrm>
+          </p:grpSpPr>
+          <p:cxnSp>
+            <p:nvCxnSpPr>
+              <p:cNvPr id="12" name="직선 연결선 11">
+                <a:extLst>
+                  <a:ext uri="{FF2B5EF4-FFF2-40B4-BE49-F238E27FC236}">
+                    <a16:creationId xmlns:a16="http://schemas.microsoft.com/office/drawing/2014/main" id="{9860EDCC-6E4A-DCFB-4887-29FF771218FA}"/>
+                  </a:ext>
+                </a:extLst>
+              </p:cNvPr>
+              <p:cNvCxnSpPr>
+                <a:cxnSpLocks/>
+              </p:cNvCxnSpPr>
+              <p:nvPr/>
+            </p:nvCxnSpPr>
+            <p:spPr>
+              <a:xfrm>
+                <a:off x="4679941" y="414259"/>
+                <a:ext cx="0" cy="5470214"/>
+              </a:xfrm>
+              <a:prstGeom prst="line">
+                <a:avLst/>
+              </a:prstGeom>
+              <a:ln>
+                <a:solidFill>
+                  <a:schemeClr val="bg1">
+                    <a:lumMod val="85000"/>
+                  </a:schemeClr>
+                </a:solidFill>
+                <a:prstDash val="dash"/>
+              </a:ln>
+            </p:spPr>
+            <p:style>
+              <a:lnRef idx="2">
+                <a:schemeClr val="accent1"/>
+              </a:lnRef>
+              <a:fillRef idx="0">
+                <a:schemeClr val="accent1"/>
+              </a:fillRef>
+              <a:effectRef idx="1">
+                <a:schemeClr val="accent1"/>
+              </a:effectRef>
+              <a:fontRef idx="minor">
+                <a:schemeClr val="tx1"/>
+              </a:fontRef>
+            </p:style>
+          </p:cxnSp>
+          <p:cxnSp>
+            <p:nvCxnSpPr>
+              <p:cNvPr id="13" name="직선 연결선 12">
+                <a:extLst>
+                  <a:ext uri="{FF2B5EF4-FFF2-40B4-BE49-F238E27FC236}">
+                    <a16:creationId xmlns:a16="http://schemas.microsoft.com/office/drawing/2014/main" id="{717E0259-F161-E906-6807-37A82DE12543}"/>
+                  </a:ext>
+                </a:extLst>
+              </p:cNvPr>
+              <p:cNvCxnSpPr>
+                <a:cxnSpLocks/>
+              </p:cNvCxnSpPr>
+              <p:nvPr/>
+            </p:nvCxnSpPr>
+            <p:spPr>
+              <a:xfrm>
+                <a:off x="7804141" y="414259"/>
+                <a:ext cx="0" cy="5470214"/>
+              </a:xfrm>
+              <a:prstGeom prst="line">
+                <a:avLst/>
+              </a:prstGeom>
+              <a:ln>
+                <a:solidFill>
+                  <a:schemeClr val="bg1">
+                    <a:lumMod val="85000"/>
+                  </a:schemeClr>
+                </a:solidFill>
+                <a:prstDash val="dash"/>
+              </a:ln>
+            </p:spPr>
+            <p:style>
+              <a:lnRef idx="2">
+                <a:schemeClr val="accent1"/>
+              </a:lnRef>
+              <a:fillRef idx="0">
+                <a:schemeClr val="accent1"/>
+              </a:fillRef>
+              <a:effectRef idx="1">
+                <a:schemeClr val="accent1"/>
+              </a:effectRef>
+              <a:fontRef idx="minor">
+                <a:schemeClr val="tx1"/>
+              </a:fontRef>
+            </p:style>
+          </p:cxnSp>
+        </p:grpSp>
+        <p:grpSp>
+          <p:nvGrpSpPr>
+            <p:cNvPr id="31" name="그룹 30">
+              <a:extLst>
+                <a:ext uri="{FF2B5EF4-FFF2-40B4-BE49-F238E27FC236}">
+                  <a16:creationId xmlns:a16="http://schemas.microsoft.com/office/drawing/2014/main" id="{3B138185-6639-A2B7-BA25-7D42353A3241}"/>
+                </a:ext>
+              </a:extLst>
+            </p:cNvPr>
+            <p:cNvGrpSpPr/>
+            <p:nvPr/>
+          </p:nvGrpSpPr>
+          <p:grpSpPr>
+            <a:xfrm>
+              <a:off x="1069966" y="3480384"/>
+              <a:ext cx="10480528" cy="0"/>
+              <a:chOff x="1069966" y="3175585"/>
+              <a:chExt cx="10480528" cy="0"/>
+            </a:xfrm>
+          </p:grpSpPr>
+          <p:cxnSp>
+            <p:nvCxnSpPr>
+              <p:cNvPr id="19" name="직선 화살표 연결선 18">
+                <a:extLst>
+                  <a:ext uri="{FF2B5EF4-FFF2-40B4-BE49-F238E27FC236}">
+                    <a16:creationId xmlns:a16="http://schemas.microsoft.com/office/drawing/2014/main" id="{351652A1-CF24-5336-4933-55FA2F4249E6}"/>
+                  </a:ext>
+                </a:extLst>
+              </p:cNvPr>
+              <p:cNvCxnSpPr>
+                <a:cxnSpLocks/>
+              </p:cNvCxnSpPr>
+              <p:nvPr/>
+            </p:nvCxnSpPr>
+            <p:spPr>
+              <a:xfrm>
+                <a:off x="1069966" y="3175585"/>
+                <a:ext cx="926953" cy="0"/>
+              </a:xfrm>
+              <a:prstGeom prst="straightConnector1">
+                <a:avLst/>
+              </a:prstGeom>
+              <a:ln>
+                <a:tailEnd type="triangle"/>
+              </a:ln>
+            </p:spPr>
+            <p:style>
+              <a:lnRef idx="2">
+                <a:schemeClr val="accent1"/>
+              </a:lnRef>
+              <a:fillRef idx="0">
+                <a:schemeClr val="accent1"/>
+              </a:fillRef>
+              <a:effectRef idx="1">
+                <a:schemeClr val="accent1"/>
+              </a:effectRef>
+              <a:fontRef idx="minor">
+                <a:schemeClr val="tx1"/>
+              </a:fontRef>
+            </p:style>
+          </p:cxnSp>
+          <p:cxnSp>
+            <p:nvCxnSpPr>
+              <p:cNvPr id="20" name="직선 화살표 연결선 19">
+                <a:extLst>
+                  <a:ext uri="{FF2B5EF4-FFF2-40B4-BE49-F238E27FC236}">
+                    <a16:creationId xmlns:a16="http://schemas.microsoft.com/office/drawing/2014/main" id="{AB01EF0F-2BC8-D62B-A68B-C8B9D4A6716C}"/>
+                  </a:ext>
+                </a:extLst>
+              </p:cNvPr>
+              <p:cNvCxnSpPr>
+                <a:cxnSpLocks/>
+              </p:cNvCxnSpPr>
+              <p:nvPr/>
+            </p:nvCxnSpPr>
+            <p:spPr>
+              <a:xfrm>
+                <a:off x="10623541" y="3175585"/>
+                <a:ext cx="926953" cy="0"/>
+              </a:xfrm>
+              <a:prstGeom prst="straightConnector1">
+                <a:avLst/>
+              </a:prstGeom>
+              <a:ln>
+                <a:tailEnd type="triangle"/>
+              </a:ln>
+            </p:spPr>
+            <p:style>
+              <a:lnRef idx="2">
+                <a:schemeClr val="accent1"/>
+              </a:lnRef>
+              <a:fillRef idx="0">
+                <a:schemeClr val="accent1"/>
+              </a:fillRef>
+              <a:effectRef idx="1">
+                <a:schemeClr val="accent1"/>
+              </a:effectRef>
+              <a:fontRef idx="minor">
+                <a:schemeClr val="tx1"/>
+              </a:fontRef>
+            </p:style>
+          </p:cxnSp>
+        </p:grpSp>
+        <p:sp>
+          <p:nvSpPr>
+            <p:cNvPr id="22" name="직사각형 21">
+              <a:extLst>
+                <a:ext uri="{FF2B5EF4-FFF2-40B4-BE49-F238E27FC236}">
+                  <a16:creationId xmlns:a16="http://schemas.microsoft.com/office/drawing/2014/main" id="{ACC4F43D-0F34-11E1-29BF-7268019657EF}"/>
+                </a:ext>
+              </a:extLst>
+            </p:cNvPr>
+            <p:cNvSpPr/>
+            <p:nvPr/>
+          </p:nvSpPr>
           <p:spPr>
             <a:xfrm>
-              <a:off x="2476500" y="2557462"/>
-              <a:ext cx="4257675" cy="981075"/>
+              <a:off x="5463252" y="5105868"/>
+              <a:ext cx="1513301" cy="758941"/>
             </a:xfrm>
             <a:prstGeom prst="rect">
               <a:avLst/>
             </a:prstGeom>
+            <a:noFill/>
+            <a:ln>
+              <a:solidFill>
+                <a:srgbClr val="A4A4A4"/>
+              </a:solidFill>
+            </a:ln>
           </p:spPr>
-        </p:pic>
-        <p:pic>
-          <p:nvPicPr>
-            <p:cNvPr id="7" name="그림 6">
+          <p:style>
+            <a:lnRef idx="2">
+              <a:schemeClr val="accent1">
+                <a:shade val="15000"/>
+              </a:schemeClr>
+            </a:lnRef>
+            <a:fillRef idx="1">
+              <a:schemeClr val="accent1"/>
+            </a:fillRef>
+            <a:effectRef idx="0">
+              <a:schemeClr val="accent1"/>
+            </a:effectRef>
+            <a:fontRef idx="minor">
+              <a:schemeClr val="lt1"/>
+            </a:fontRef>
+          </p:style>
+          <p:txBody>
+            <a:bodyPr rtlCol="0" anchor="ctr"/>
+            <a:lstStyle/>
+            <a:p>
+              <a:pPr algn="ctr"/>
+              <a:endParaRPr lang="ko-KR" altLang="en-US"/>
+            </a:p>
+          </p:txBody>
+        </p:sp>
+        <p:cxnSp>
+          <p:nvCxnSpPr>
+            <p:cNvPr id="24" name="직선 화살표 연결선 23">
               <a:extLst>
                 <a:ext uri="{FF2B5EF4-FFF2-40B4-BE49-F238E27FC236}">
-                  <a16:creationId xmlns:a16="http://schemas.microsoft.com/office/drawing/2014/main" id="{1563D916-2880-729E-EB84-2B477F21EBDD}"/>
-                </a:ext>
-              </a:extLst>
-            </p:cNvPr>
-            <p:cNvPicPr>
-              <a:picLocks noChangeAspect="1"/>
-            </p:cNvPicPr>
-            <p:nvPr/>
-          </p:nvPicPr>
-          <p:blipFill>
-            <a:blip r:embed="rId3"/>
-            <a:stretch>
-              <a:fillRect/>
-            </a:stretch>
-          </p:blipFill>
-          <p:spPr>
-            <a:xfrm>
-              <a:off x="6588125" y="2563812"/>
-              <a:ext cx="3048000" cy="904875"/>
-            </a:xfrm>
-            <a:prstGeom prst="rect">
-              <a:avLst/>
-            </a:prstGeom>
-          </p:spPr>
-        </p:pic>
-      </p:grpSp>
-      <p:grpSp>
-        <p:nvGrpSpPr>
-          <p:cNvPr id="23" name="그룹 22">
-            <a:extLst>
-              <a:ext uri="{FF2B5EF4-FFF2-40B4-BE49-F238E27FC236}">
-                <a16:creationId xmlns:a16="http://schemas.microsoft.com/office/drawing/2014/main" id="{85E77AA4-1B24-2DDA-9B1A-73AD00BECFD8}"/>
-              </a:ext>
-            </a:extLst>
-          </p:cNvPr>
-          <p:cNvGrpSpPr/>
-          <p:nvPr/>
-        </p:nvGrpSpPr>
-        <p:grpSpPr>
-          <a:xfrm>
-            <a:off x="4679941" y="2290915"/>
-            <a:ext cx="3124200" cy="3593557"/>
-            <a:chOff x="4457700" y="676275"/>
-            <a:chExt cx="3124200" cy="4752975"/>
-          </a:xfrm>
-        </p:grpSpPr>
-        <p:cxnSp>
-          <p:nvCxnSpPr>
-            <p:cNvPr id="12" name="직선 연결선 11">
-              <a:extLst>
-                <a:ext uri="{FF2B5EF4-FFF2-40B4-BE49-F238E27FC236}">
-                  <a16:creationId xmlns:a16="http://schemas.microsoft.com/office/drawing/2014/main" id="{587D70BA-4FF4-AACF-4E0B-2D6A8DF63EA4}"/>
+                  <a16:creationId xmlns:a16="http://schemas.microsoft.com/office/drawing/2014/main" id="{50050C19-C3EA-39E0-62BB-BE0EAF4CDD21}"/>
                 </a:ext>
               </a:extLst>
             </p:cNvPr>
@@ -9666,126 +11314,16 @@
           </p:nvCxnSpPr>
           <p:spPr>
             <a:xfrm>
-              <a:off x="4457700" y="676275"/>
-              <a:ext cx="0" cy="4752975"/>
-            </a:xfrm>
-            <a:prstGeom prst="line">
-              <a:avLst/>
-            </a:prstGeom>
-            <a:ln>
-              <a:solidFill>
-                <a:schemeClr val="bg1">
-                  <a:lumMod val="85000"/>
-                </a:schemeClr>
-              </a:solidFill>
-              <a:prstDash val="dash"/>
-            </a:ln>
-          </p:spPr>
-          <p:style>
-            <a:lnRef idx="2">
-              <a:schemeClr val="accent1"/>
-            </a:lnRef>
-            <a:fillRef idx="0">
-              <a:schemeClr val="accent1"/>
-            </a:fillRef>
-            <a:effectRef idx="1">
-              <a:schemeClr val="accent1"/>
-            </a:effectRef>
-            <a:fontRef idx="minor">
-              <a:schemeClr val="tx1"/>
-            </a:fontRef>
-          </p:style>
-        </p:cxnSp>
-        <p:cxnSp>
-          <p:nvCxnSpPr>
-            <p:cNvPr id="13" name="직선 연결선 12">
-              <a:extLst>
-                <a:ext uri="{FF2B5EF4-FFF2-40B4-BE49-F238E27FC236}">
-                  <a16:creationId xmlns:a16="http://schemas.microsoft.com/office/drawing/2014/main" id="{87F7656D-5091-A174-D73D-5E7E1D9DA361}"/>
-                </a:ext>
-              </a:extLst>
-            </p:cNvPr>
-            <p:cNvCxnSpPr>
-              <a:cxnSpLocks/>
-            </p:cNvCxnSpPr>
-            <p:nvPr/>
-          </p:nvCxnSpPr>
-          <p:spPr>
-            <a:xfrm>
-              <a:off x="7581900" y="676275"/>
-              <a:ext cx="0" cy="4752975"/>
-            </a:xfrm>
-            <a:prstGeom prst="line">
-              <a:avLst/>
-            </a:prstGeom>
-            <a:ln>
-              <a:solidFill>
-                <a:schemeClr val="bg1">
-                  <a:lumMod val="85000"/>
-                </a:schemeClr>
-              </a:solidFill>
-              <a:prstDash val="dash"/>
-            </a:ln>
-          </p:spPr>
-          <p:style>
-            <a:lnRef idx="2">
-              <a:schemeClr val="accent1"/>
-            </a:lnRef>
-            <a:fillRef idx="0">
-              <a:schemeClr val="accent1"/>
-            </a:fillRef>
-            <a:effectRef idx="1">
-              <a:schemeClr val="accent1"/>
-            </a:effectRef>
-            <a:fontRef idx="minor">
-              <a:schemeClr val="tx1"/>
-            </a:fontRef>
-          </p:style>
-        </p:cxnSp>
-      </p:grpSp>
-      <p:grpSp>
-        <p:nvGrpSpPr>
-          <p:cNvPr id="31" name="그룹 30">
-            <a:extLst>
-              <a:ext uri="{FF2B5EF4-FFF2-40B4-BE49-F238E27FC236}">
-                <a16:creationId xmlns:a16="http://schemas.microsoft.com/office/drawing/2014/main" id="{BC38CA11-9DC5-0B2A-2749-2A44E927C324}"/>
-              </a:ext>
-            </a:extLst>
-          </p:cNvPr>
-          <p:cNvGrpSpPr/>
-          <p:nvPr/>
-        </p:nvGrpSpPr>
-        <p:grpSpPr>
-          <a:xfrm>
-            <a:off x="1069966" y="3480384"/>
-            <a:ext cx="10480528" cy="0"/>
-            <a:chOff x="1069966" y="3175585"/>
-            <a:chExt cx="10480528" cy="0"/>
-          </a:xfrm>
-        </p:grpSpPr>
-        <p:cxnSp>
-          <p:nvCxnSpPr>
-            <p:cNvPr id="19" name="직선 화살표 연결선 18">
-              <a:extLst>
-                <a:ext uri="{FF2B5EF4-FFF2-40B4-BE49-F238E27FC236}">
-                  <a16:creationId xmlns:a16="http://schemas.microsoft.com/office/drawing/2014/main" id="{D1961E68-38B7-2979-1470-61D11D9E0255}"/>
-                </a:ext>
-              </a:extLst>
-            </p:cNvPr>
-            <p:cNvCxnSpPr>
-              <a:cxnSpLocks/>
-            </p:cNvCxnSpPr>
-            <p:nvPr/>
-          </p:nvCxnSpPr>
-          <p:spPr>
-            <a:xfrm>
-              <a:off x="1069966" y="3175585"/>
-              <a:ext cx="926953" cy="0"/>
+              <a:off x="6219903" y="3852167"/>
+              <a:ext cx="0" cy="1253701"/>
             </a:xfrm>
             <a:prstGeom prst="straightConnector1">
               <a:avLst/>
             </a:prstGeom>
             <a:ln>
+              <a:solidFill>
+                <a:srgbClr val="A4A4A4"/>
+              </a:solidFill>
               <a:tailEnd type="triangle"/>
             </a:ln>
           </p:spPr>
@@ -9804,54 +11342,802 @@
             </a:fontRef>
           </p:style>
         </p:cxnSp>
-        <p:cxnSp>
-          <p:nvCxnSpPr>
-            <p:cNvPr id="20" name="직선 화살표 연결선 19">
+        <p:sp>
+          <p:nvSpPr>
+            <p:cNvPr id="25" name="직사각형 24">
               <a:extLst>
                 <a:ext uri="{FF2B5EF4-FFF2-40B4-BE49-F238E27FC236}">
-                  <a16:creationId xmlns:a16="http://schemas.microsoft.com/office/drawing/2014/main" id="{B7F63BC9-1184-75E2-E8FF-01F016D315EB}"/>
+                  <a16:creationId xmlns:a16="http://schemas.microsoft.com/office/drawing/2014/main" id="{94C7349F-0ADE-F50B-6181-BFA7249EBF2F}"/>
                 </a:ext>
               </a:extLst>
             </p:cNvPr>
-            <p:cNvCxnSpPr>
-              <a:cxnSpLocks/>
-            </p:cNvCxnSpPr>
+            <p:cNvSpPr/>
             <p:nvPr/>
-          </p:nvCxnSpPr>
+          </p:nvSpPr>
           <p:spPr>
-            <a:xfrm>
-              <a:off x="10623541" y="3175585"/>
-              <a:ext cx="926953" cy="0"/>
+            <a:xfrm flipV="1">
+              <a:off x="6083022" y="3609338"/>
+              <a:ext cx="273761" cy="242829"/>
             </a:xfrm>
-            <a:prstGeom prst="straightConnector1">
+            <a:prstGeom prst="rect">
               <a:avLst/>
             </a:prstGeom>
+            <a:noFill/>
             <a:ln>
-              <a:tailEnd type="triangle"/>
+              <a:noFill/>
             </a:ln>
           </p:spPr>
           <p:style>
             <a:lnRef idx="2">
-              <a:schemeClr val="accent1"/>
+              <a:schemeClr val="accent1">
+                <a:shade val="15000"/>
+              </a:schemeClr>
             </a:lnRef>
-            <a:fillRef idx="0">
+            <a:fillRef idx="1">
               <a:schemeClr val="accent1"/>
             </a:fillRef>
-            <a:effectRef idx="1">
+            <a:effectRef idx="0">
               <a:schemeClr val="accent1"/>
             </a:effectRef>
             <a:fontRef idx="minor">
-              <a:schemeClr val="tx1"/>
+              <a:schemeClr val="lt1"/>
             </a:fontRef>
           </p:style>
-        </p:cxnSp>
+          <p:txBody>
+            <a:bodyPr rtlCol="0" anchor="ctr"/>
+            <a:lstStyle/>
+            <a:p>
+              <a:pPr algn="ctr"/>
+              <a:endParaRPr lang="ko-KR" altLang="en-US">
+                <a:noFill/>
+              </a:endParaRPr>
+            </a:p>
+          </p:txBody>
+        </p:sp>
+        <p:sp>
+          <p:nvSpPr>
+            <p:cNvPr id="26" name="직사각형 25">
+              <a:extLst>
+                <a:ext uri="{FF2B5EF4-FFF2-40B4-BE49-F238E27FC236}">
+                  <a16:creationId xmlns:a16="http://schemas.microsoft.com/office/drawing/2014/main" id="{A72F583B-2A62-D8E2-68C2-E59D37355CCA}"/>
+                </a:ext>
+              </a:extLst>
+            </p:cNvPr>
+            <p:cNvSpPr/>
+            <p:nvPr/>
+          </p:nvSpPr>
+          <p:spPr>
+            <a:xfrm flipV="1">
+              <a:off x="6083022" y="5105868"/>
+              <a:ext cx="273761" cy="242829"/>
+            </a:xfrm>
+            <a:prstGeom prst="rect">
+              <a:avLst/>
+            </a:prstGeom>
+            <a:noFill/>
+            <a:ln>
+              <a:noFill/>
+            </a:ln>
+          </p:spPr>
+          <p:style>
+            <a:lnRef idx="2">
+              <a:schemeClr val="accent1">
+                <a:shade val="15000"/>
+              </a:schemeClr>
+            </a:lnRef>
+            <a:fillRef idx="1">
+              <a:schemeClr val="accent1"/>
+            </a:fillRef>
+            <a:effectRef idx="0">
+              <a:schemeClr val="accent1"/>
+            </a:effectRef>
+            <a:fontRef idx="minor">
+              <a:schemeClr val="lt1"/>
+            </a:fontRef>
+          </p:style>
+          <p:txBody>
+            <a:bodyPr rtlCol="0" anchor="ctr"/>
+            <a:lstStyle/>
+            <a:p>
+              <a:pPr algn="ctr"/>
+              <a:endParaRPr lang="ko-KR" altLang="en-US">
+                <a:noFill/>
+              </a:endParaRPr>
+            </a:p>
+          </p:txBody>
+        </p:sp>
+        <p:sp>
+          <p:nvSpPr>
+            <p:cNvPr id="3" name="TextBox 2">
+              <a:extLst>
+                <a:ext uri="{FF2B5EF4-FFF2-40B4-BE49-F238E27FC236}">
+                  <a16:creationId xmlns:a16="http://schemas.microsoft.com/office/drawing/2014/main" id="{1F04BA77-A9DC-451A-5865-45E543777213}"/>
+                </a:ext>
+              </a:extLst>
+            </p:cNvPr>
+            <p:cNvSpPr txBox="1"/>
+            <p:nvPr/>
+          </p:nvSpPr>
+          <p:spPr>
+            <a:xfrm>
+              <a:off x="5743292" y="5316061"/>
+              <a:ext cx="946093" cy="338554"/>
+            </a:xfrm>
+            <a:prstGeom prst="rect">
+              <a:avLst/>
+            </a:prstGeom>
+            <a:noFill/>
+          </p:spPr>
+          <p:txBody>
+            <a:bodyPr wrap="none" rtlCol="0">
+              <a:spAutoFit/>
+            </a:bodyPr>
+            <a:lstStyle/>
+            <a:p>
+              <a:r>
+                <a:rPr lang="en-US" altLang="ko-KR" sz="1600" b="1">
+                  <a:solidFill>
+                    <a:srgbClr val="708A41"/>
+                  </a:solidFill>
+                </a:rPr>
+                <a:t>Domain</a:t>
+              </a:r>
+              <a:endParaRPr lang="ko-KR" altLang="en-US" sz="1600" b="1">
+                <a:solidFill>
+                  <a:srgbClr val="708A41"/>
+                </a:solidFill>
+              </a:endParaRPr>
+            </a:p>
+          </p:txBody>
+        </p:sp>
+        <p:sp>
+          <p:nvSpPr>
+            <p:cNvPr id="15" name="TextBox 14">
+              <a:extLst>
+                <a:ext uri="{FF2B5EF4-FFF2-40B4-BE49-F238E27FC236}">
+                  <a16:creationId xmlns:a16="http://schemas.microsoft.com/office/drawing/2014/main" id="{21BA7D44-40A4-4FF1-076B-FAB817DBA8D6}"/>
+                </a:ext>
+              </a:extLst>
+            </p:cNvPr>
+            <p:cNvSpPr txBox="1"/>
+            <p:nvPr/>
+          </p:nvSpPr>
+          <p:spPr>
+            <a:xfrm>
+              <a:off x="1900266" y="832014"/>
+              <a:ext cx="1729641" cy="369332"/>
+            </a:xfrm>
+            <a:prstGeom prst="rect">
+              <a:avLst/>
+            </a:prstGeom>
+            <a:noFill/>
+          </p:spPr>
+          <p:txBody>
+            <a:bodyPr wrap="none" rtlCol="0">
+              <a:spAutoFit/>
+            </a:bodyPr>
+            <a:lstStyle/>
+            <a:p>
+              <a:pPr algn="ctr"/>
+              <a:r>
+                <a:rPr lang="en-US" altLang="ko-KR" b="1">
+                  <a:solidFill>
+                    <a:srgbClr val="0070C0"/>
+                  </a:solidFill>
+                </a:rPr>
+                <a:t>Adapter </a:t>
+              </a:r>
+              <a:r>
+                <a:rPr lang="en-GB" altLang="ko-KR" b="1">
+                  <a:solidFill>
+                    <a:srgbClr val="0070C0"/>
+                  </a:solidFill>
+                </a:rPr>
+                <a:t>Layer</a:t>
+              </a:r>
+              <a:endParaRPr lang="ko-KR" altLang="en-US" b="1">
+                <a:solidFill>
+                  <a:srgbClr val="0070C0"/>
+                </a:solidFill>
+              </a:endParaRPr>
+            </a:p>
+          </p:txBody>
+        </p:sp>
+        <p:sp>
+          <p:nvSpPr>
+            <p:cNvPr id="16" name="TextBox 15">
+              <a:extLst>
+                <a:ext uri="{FF2B5EF4-FFF2-40B4-BE49-F238E27FC236}">
+                  <a16:creationId xmlns:a16="http://schemas.microsoft.com/office/drawing/2014/main" id="{B70FF85F-1DCF-3092-3BEE-CCB69012E2A4}"/>
+                </a:ext>
+              </a:extLst>
+            </p:cNvPr>
+            <p:cNvSpPr txBox="1"/>
+            <p:nvPr/>
+          </p:nvSpPr>
+          <p:spPr>
+            <a:xfrm>
+              <a:off x="8953966" y="832014"/>
+              <a:ext cx="1729641" cy="369332"/>
+            </a:xfrm>
+            <a:prstGeom prst="rect">
+              <a:avLst/>
+            </a:prstGeom>
+            <a:noFill/>
+          </p:spPr>
+          <p:txBody>
+            <a:bodyPr wrap="none" rtlCol="0">
+              <a:spAutoFit/>
+            </a:bodyPr>
+            <a:lstStyle/>
+            <a:p>
+              <a:pPr algn="ctr"/>
+              <a:r>
+                <a:rPr lang="en-US" altLang="ko-KR" b="1">
+                  <a:solidFill>
+                    <a:srgbClr val="0070C0"/>
+                  </a:solidFill>
+                </a:rPr>
+                <a:t>Adapter </a:t>
+              </a:r>
+              <a:r>
+                <a:rPr lang="en-GB" altLang="ko-KR" b="1">
+                  <a:solidFill>
+                    <a:srgbClr val="0070C0"/>
+                  </a:solidFill>
+                </a:rPr>
+                <a:t>Layer</a:t>
+              </a:r>
+              <a:endParaRPr lang="ko-KR" altLang="en-US" b="1">
+                <a:solidFill>
+                  <a:srgbClr val="0070C0"/>
+                </a:solidFill>
+              </a:endParaRPr>
+            </a:p>
+          </p:txBody>
+        </p:sp>
+        <p:sp>
+          <p:nvSpPr>
+            <p:cNvPr id="17" name="TextBox 16">
+              <a:extLst>
+                <a:ext uri="{FF2B5EF4-FFF2-40B4-BE49-F238E27FC236}">
+                  <a16:creationId xmlns:a16="http://schemas.microsoft.com/office/drawing/2014/main" id="{9952731A-141A-9D37-6B5E-500A9C271733}"/>
+                </a:ext>
+              </a:extLst>
+            </p:cNvPr>
+            <p:cNvSpPr txBox="1"/>
+            <p:nvPr/>
+          </p:nvSpPr>
+          <p:spPr>
+            <a:xfrm>
+              <a:off x="5191561" y="832014"/>
+              <a:ext cx="2100960" cy="369332"/>
+            </a:xfrm>
+            <a:prstGeom prst="rect">
+              <a:avLst/>
+            </a:prstGeom>
+            <a:noFill/>
+          </p:spPr>
+          <p:txBody>
+            <a:bodyPr wrap="none" rtlCol="0">
+              <a:spAutoFit/>
+            </a:bodyPr>
+            <a:lstStyle/>
+            <a:p>
+              <a:r>
+                <a:rPr lang="en-US" altLang="ko-KR" b="1">
+                  <a:solidFill>
+                    <a:srgbClr val="0070C0"/>
+                  </a:solidFill>
+                </a:rPr>
+                <a:t>Application </a:t>
+              </a:r>
+              <a:r>
+                <a:rPr lang="en-GB" altLang="ko-KR" b="1">
+                  <a:solidFill>
+                    <a:srgbClr val="0070C0"/>
+                  </a:solidFill>
+                </a:rPr>
+                <a:t>Layer</a:t>
+              </a:r>
+              <a:endParaRPr lang="ko-KR" altLang="en-US" b="1">
+                <a:solidFill>
+                  <a:srgbClr val="0070C0"/>
+                </a:solidFill>
+              </a:endParaRPr>
+            </a:p>
+          </p:txBody>
+        </p:sp>
+        <p:sp>
+          <p:nvSpPr>
+            <p:cNvPr id="18" name="직사각형 17">
+              <a:extLst>
+                <a:ext uri="{FF2B5EF4-FFF2-40B4-BE49-F238E27FC236}">
+                  <a16:creationId xmlns:a16="http://schemas.microsoft.com/office/drawing/2014/main" id="{639DF5E5-63D7-BCEB-0A06-9B2AED5A5CE3}"/>
+                </a:ext>
+              </a:extLst>
+            </p:cNvPr>
+            <p:cNvSpPr/>
+            <p:nvPr/>
+          </p:nvSpPr>
+          <p:spPr>
+            <a:xfrm>
+              <a:off x="4798122" y="5938916"/>
+              <a:ext cx="2900515" cy="758941"/>
+            </a:xfrm>
+            <a:prstGeom prst="rect">
+              <a:avLst/>
+            </a:prstGeom>
+            <a:solidFill>
+              <a:schemeClr val="bg1"/>
+            </a:solidFill>
+            <a:ln>
+              <a:solidFill>
+                <a:schemeClr val="bg1"/>
+              </a:solidFill>
+            </a:ln>
+          </p:spPr>
+          <p:style>
+            <a:lnRef idx="2">
+              <a:schemeClr val="accent1">
+                <a:shade val="15000"/>
+              </a:schemeClr>
+            </a:lnRef>
+            <a:fillRef idx="1">
+              <a:schemeClr val="accent1"/>
+            </a:fillRef>
+            <a:effectRef idx="0">
+              <a:schemeClr val="accent1"/>
+            </a:effectRef>
+            <a:fontRef idx="minor">
+              <a:schemeClr val="lt1"/>
+            </a:fontRef>
+          </p:style>
+          <p:txBody>
+            <a:bodyPr rtlCol="0" anchor="ctr"/>
+            <a:lstStyle/>
+            <a:p>
+              <a:pPr algn="ctr"/>
+              <a:endParaRPr lang="ko-KR" altLang="en-US">
+                <a:ln>
+                  <a:solidFill>
+                    <a:schemeClr val="bg1"/>
+                  </a:solidFill>
+                </a:ln>
+                <a:solidFill>
+                  <a:schemeClr val="bg1"/>
+                </a:solidFill>
+              </a:endParaRPr>
+            </a:p>
+          </p:txBody>
+        </p:sp>
+        <p:sp>
+          <p:nvSpPr>
+            <p:cNvPr id="27" name="TextBox 26">
+              <a:extLst>
+                <a:ext uri="{FF2B5EF4-FFF2-40B4-BE49-F238E27FC236}">
+                  <a16:creationId xmlns:a16="http://schemas.microsoft.com/office/drawing/2014/main" id="{972F4548-4A68-0146-5537-F64E0CED593D}"/>
+                </a:ext>
+              </a:extLst>
+            </p:cNvPr>
+            <p:cNvSpPr txBox="1"/>
+            <p:nvPr/>
+          </p:nvSpPr>
+          <p:spPr>
+            <a:xfrm>
+              <a:off x="5388728" y="6024184"/>
+              <a:ext cx="1706621" cy="369332"/>
+            </a:xfrm>
+            <a:prstGeom prst="rect">
+              <a:avLst/>
+            </a:prstGeom>
+            <a:noFill/>
+          </p:spPr>
+          <p:txBody>
+            <a:bodyPr wrap="none" rtlCol="0">
+              <a:spAutoFit/>
+            </a:bodyPr>
+            <a:lstStyle/>
+            <a:p>
+              <a:r>
+                <a:rPr lang="en-US" altLang="ko-KR" b="1">
+                  <a:solidFill>
+                    <a:srgbClr val="0070C0"/>
+                  </a:solidFill>
+                </a:rPr>
+                <a:t>Domain </a:t>
+              </a:r>
+              <a:r>
+                <a:rPr lang="en-GB" altLang="ko-KR" b="1">
+                  <a:solidFill>
+                    <a:srgbClr val="0070C0"/>
+                  </a:solidFill>
+                </a:rPr>
+                <a:t>Layer</a:t>
+              </a:r>
+              <a:endParaRPr lang="ko-KR" altLang="en-US" b="1">
+                <a:solidFill>
+                  <a:srgbClr val="0070C0"/>
+                </a:solidFill>
+              </a:endParaRPr>
+            </a:p>
+          </p:txBody>
+        </p:sp>
+        <p:sp>
+          <p:nvSpPr>
+            <p:cNvPr id="2" name="TextBox 1">
+              <a:extLst>
+                <a:ext uri="{FF2B5EF4-FFF2-40B4-BE49-F238E27FC236}">
+                  <a16:creationId xmlns:a16="http://schemas.microsoft.com/office/drawing/2014/main" id="{A2AF5DAC-1D8A-8079-D419-A70FED8449DF}"/>
+                </a:ext>
+              </a:extLst>
+            </p:cNvPr>
+            <p:cNvSpPr txBox="1"/>
+            <p:nvPr/>
+          </p:nvSpPr>
+          <p:spPr>
+            <a:xfrm>
+              <a:off x="4501988" y="4300606"/>
+              <a:ext cx="1661993" cy="610616"/>
+            </a:xfrm>
+            <a:prstGeom prst="rect">
+              <a:avLst/>
+            </a:prstGeom>
+            <a:noFill/>
+          </p:spPr>
+          <p:txBody>
+            <a:bodyPr wrap="none" rtlCol="0">
+              <a:spAutoFit/>
+            </a:bodyPr>
+            <a:lstStyle/>
+            <a:p>
+              <a:pPr algn="r">
+                <a:lnSpc>
+                  <a:spcPct val="150000"/>
+                </a:lnSpc>
+              </a:pPr>
+              <a:r>
+                <a:rPr lang="en-US" altLang="ko-KR" sz="1200" b="1">
+                  <a:solidFill>
+                    <a:srgbClr val="C00000"/>
+                  </a:solidFill>
+                </a:rPr>
+                <a:t>Fin&lt;T&gt;</a:t>
+              </a:r>
+            </a:p>
+            <a:p>
+              <a:pPr algn="r">
+                <a:lnSpc>
+                  <a:spcPct val="150000"/>
+                </a:lnSpc>
+              </a:pPr>
+              <a:r>
+                <a:rPr lang="en-US" altLang="ko-KR" sz="1200" b="1">
+                  <a:solidFill>
+                    <a:srgbClr val="C00000"/>
+                  </a:solidFill>
+                </a:rPr>
+                <a:t>Validation&lt;Error,</a:t>
+              </a:r>
+              <a:r>
+                <a:rPr lang="ko-KR" altLang="en-US" sz="1200" b="1">
+                  <a:solidFill>
+                    <a:srgbClr val="C00000"/>
+                  </a:solidFill>
+                </a:rPr>
+                <a:t> </a:t>
+              </a:r>
+              <a:r>
+                <a:rPr lang="en-US" altLang="ko-KR" sz="1200" b="1">
+                  <a:solidFill>
+                    <a:srgbClr val="C00000"/>
+                  </a:solidFill>
+                </a:rPr>
+                <a:t>T&gt;</a:t>
+              </a:r>
+              <a:endParaRPr lang="ko-KR" altLang="en-US" sz="1200" b="1">
+                <a:solidFill>
+                  <a:srgbClr val="C00000"/>
+                </a:solidFill>
+              </a:endParaRPr>
+            </a:p>
+          </p:txBody>
+        </p:sp>
+        <p:sp>
+          <p:nvSpPr>
+            <p:cNvPr id="21" name="TextBox 20">
+              <a:extLst>
+                <a:ext uri="{FF2B5EF4-FFF2-40B4-BE49-F238E27FC236}">
+                  <a16:creationId xmlns:a16="http://schemas.microsoft.com/office/drawing/2014/main" id="{6F272F85-8FF6-7BD5-CA23-51888AB3F256}"/>
+                </a:ext>
+              </a:extLst>
+            </p:cNvPr>
+            <p:cNvSpPr txBox="1"/>
+            <p:nvPr/>
+          </p:nvSpPr>
+          <p:spPr>
+            <a:xfrm>
+              <a:off x="8805441" y="1989630"/>
+              <a:ext cx="2485937" cy="887615"/>
+            </a:xfrm>
+            <a:prstGeom prst="rect">
+              <a:avLst/>
+            </a:prstGeom>
+            <a:noFill/>
+          </p:spPr>
+          <p:txBody>
+            <a:bodyPr wrap="none" rtlCol="0">
+              <a:spAutoFit/>
+            </a:bodyPr>
+            <a:lstStyle/>
+            <a:p>
+              <a:pPr>
+                <a:lnSpc>
+                  <a:spcPct val="150000"/>
+                </a:lnSpc>
+              </a:pPr>
+              <a:r>
+                <a:rPr lang="en-US" altLang="ko-KR" sz="1200" b="1">
+                  <a:solidFill>
+                    <a:srgbClr val="C00000"/>
+                  </a:solidFill>
+                </a:rPr>
+                <a:t>IAdatper</a:t>
+              </a:r>
+            </a:p>
+            <a:p>
+              <a:pPr>
+                <a:lnSpc>
+                  <a:spcPct val="150000"/>
+                </a:lnSpc>
+              </a:pPr>
+              <a:r>
+                <a:rPr lang="en-US" altLang="ko-KR" sz="1200" b="1">
+                  <a:solidFill>
+                    <a:srgbClr val="C00000"/>
+                  </a:solidFill>
+                </a:rPr>
+                <a:t>Observability Source Generator</a:t>
+              </a:r>
+            </a:p>
+            <a:p>
+              <a:pPr>
+                <a:lnSpc>
+                  <a:spcPct val="150000"/>
+                </a:lnSpc>
+              </a:pPr>
+              <a:r>
+                <a:rPr lang="en-US" altLang="ko-KR" sz="1200" b="1">
+                  <a:solidFill>
+                    <a:srgbClr val="C00000"/>
+                  </a:solidFill>
+                </a:rPr>
+                <a:t>FinT&lt;IO, T&gt;</a:t>
+              </a:r>
+              <a:endParaRPr lang="ko-KR" altLang="en-US" sz="1200" b="1">
+                <a:solidFill>
+                  <a:srgbClr val="C00000"/>
+                </a:solidFill>
+              </a:endParaRPr>
+            </a:p>
+          </p:txBody>
+        </p:sp>
+        <p:sp>
+          <p:nvSpPr>
+            <p:cNvPr id="23" name="TextBox 22">
+              <a:extLst>
+                <a:ext uri="{FF2B5EF4-FFF2-40B4-BE49-F238E27FC236}">
+                  <a16:creationId xmlns:a16="http://schemas.microsoft.com/office/drawing/2014/main" id="{679DD95D-4D18-DA4D-6926-65A9CEA63EE4}"/>
+                </a:ext>
+              </a:extLst>
+            </p:cNvPr>
+            <p:cNvSpPr txBox="1"/>
+            <p:nvPr/>
+          </p:nvSpPr>
+          <p:spPr>
+            <a:xfrm>
+              <a:off x="4699196" y="1297132"/>
+              <a:ext cx="4398961" cy="1580113"/>
+            </a:xfrm>
+            <a:prstGeom prst="rect">
+              <a:avLst/>
+            </a:prstGeom>
+            <a:noFill/>
+          </p:spPr>
+          <p:txBody>
+            <a:bodyPr wrap="none" rtlCol="0">
+              <a:spAutoFit/>
+            </a:bodyPr>
+            <a:lstStyle/>
+            <a:p>
+              <a:pPr>
+                <a:lnSpc>
+                  <a:spcPct val="150000"/>
+                </a:lnSpc>
+              </a:pPr>
+              <a:r>
+                <a:rPr lang="en-US" altLang="ko-KR" sz="1200" b="1">
+                  <a:solidFill>
+                    <a:srgbClr val="C00000"/>
+                  </a:solidFill>
+                </a:rPr>
+                <a:t>CQRS</a:t>
+              </a:r>
+            </a:p>
+            <a:p>
+              <a:pPr marL="266700" lvl="1" indent="-179388">
+                <a:lnSpc>
+                  <a:spcPct val="150000"/>
+                </a:lnSpc>
+                <a:buFontTx/>
+                <a:buChar char="-"/>
+              </a:pPr>
+              <a:r>
+                <a:rPr lang="en-US" altLang="ko-KR" sz="1000">
+                  <a:solidFill>
+                    <a:srgbClr val="C00000"/>
+                  </a:solidFill>
+                </a:rPr>
+                <a:t>ICommandRequest&lt;TInput&gt;, ICommandUsecase&lt;TInput, TOutput&gt;</a:t>
+              </a:r>
+            </a:p>
+            <a:p>
+              <a:pPr marL="266700" lvl="1" indent="-179388">
+                <a:lnSpc>
+                  <a:spcPct val="150000"/>
+                </a:lnSpc>
+                <a:buFontTx/>
+                <a:buChar char="-"/>
+              </a:pPr>
+              <a:r>
+                <a:rPr lang="en-US" altLang="ko-KR" sz="1000">
+                  <a:solidFill>
+                    <a:srgbClr val="C00000"/>
+                  </a:solidFill>
+                </a:rPr>
+                <a:t>IQueryRequest&lt;TInput&gt;, IQueryUsecase&lt;TInput, TOutput&gt;</a:t>
+              </a:r>
+            </a:p>
+            <a:p>
+              <a:pPr marL="266700" lvl="1" indent="-179388">
+                <a:lnSpc>
+                  <a:spcPct val="150000"/>
+                </a:lnSpc>
+                <a:buFontTx/>
+                <a:buChar char="-"/>
+              </a:pPr>
+              <a:r>
+                <a:rPr lang="en-US" altLang="ko-KR" sz="1000">
+                  <a:solidFill>
+                    <a:srgbClr val="C00000"/>
+                  </a:solidFill>
+                </a:rPr>
+                <a:t>IFinResponse&lt;T&gt;</a:t>
+              </a:r>
+            </a:p>
+            <a:p>
+              <a:pPr>
+                <a:lnSpc>
+                  <a:spcPct val="150000"/>
+                </a:lnSpc>
+              </a:pPr>
+              <a:r>
+                <a:rPr lang="en-US" altLang="ko-KR" sz="1200" b="1">
+                  <a:solidFill>
+                    <a:srgbClr val="C00000"/>
+                  </a:solidFill>
+                </a:rPr>
+                <a:t>Observability CQRS Pipeline</a:t>
+              </a:r>
+            </a:p>
+            <a:p>
+              <a:pPr>
+                <a:lnSpc>
+                  <a:spcPct val="150000"/>
+                </a:lnSpc>
+              </a:pPr>
+              <a:r>
+                <a:rPr lang="en-US" altLang="ko-KR" sz="1200" b="1">
+                  <a:solidFill>
+                    <a:srgbClr val="C00000"/>
+                  </a:solidFill>
+                </a:rPr>
+                <a:t>FinT&lt;IO, T&gt; LINQ</a:t>
+              </a:r>
+              <a:endParaRPr lang="ko-KR" altLang="en-US" sz="1200" b="1">
+                <a:solidFill>
+                  <a:srgbClr val="C00000"/>
+                </a:solidFill>
+              </a:endParaRPr>
+            </a:p>
+          </p:txBody>
+        </p:sp>
+        <p:sp>
+          <p:nvSpPr>
+            <p:cNvPr id="4" name="TextBox 3">
+              <a:extLst>
+                <a:ext uri="{FF2B5EF4-FFF2-40B4-BE49-F238E27FC236}">
+                  <a16:creationId xmlns:a16="http://schemas.microsoft.com/office/drawing/2014/main" id="{1E3D7D7A-1D31-989F-F1E5-577234CA5FE4}"/>
+                </a:ext>
+              </a:extLst>
+            </p:cNvPr>
+            <p:cNvSpPr txBox="1"/>
+            <p:nvPr/>
+          </p:nvSpPr>
+          <p:spPr>
+            <a:xfrm>
+              <a:off x="1796642" y="1643381"/>
+              <a:ext cx="2027093" cy="887615"/>
+            </a:xfrm>
+            <a:prstGeom prst="rect">
+              <a:avLst/>
+            </a:prstGeom>
+            <a:noFill/>
+          </p:spPr>
+          <p:txBody>
+            <a:bodyPr wrap="none" rtlCol="0">
+              <a:spAutoFit/>
+            </a:bodyPr>
+            <a:lstStyle/>
+            <a:p>
+              <a:pPr>
+                <a:lnSpc>
+                  <a:spcPct val="150000"/>
+                </a:lnSpc>
+              </a:pPr>
+              <a:r>
+                <a:rPr lang="en-US" altLang="ko-KR" sz="1200" b="1">
+                  <a:solidFill>
+                    <a:srgbClr val="C00000"/>
+                  </a:solidFill>
+                </a:rPr>
+                <a:t>Structured Error</a:t>
+              </a:r>
+              <a:endParaRPr lang="en-GB" altLang="ko-KR" sz="1200" b="1">
+                <a:solidFill>
+                  <a:srgbClr val="C00000"/>
+                </a:solidFill>
+              </a:endParaRPr>
+            </a:p>
+            <a:p>
+              <a:pPr>
+                <a:lnSpc>
+                  <a:spcPct val="150000"/>
+                </a:lnSpc>
+              </a:pPr>
+              <a:r>
+                <a:rPr lang="en-US" altLang="ko-KR" sz="1200" b="1">
+                  <a:solidFill>
+                    <a:srgbClr val="C00000"/>
+                  </a:solidFill>
+                </a:rPr>
+                <a:t>Observability Pipeline</a:t>
+              </a:r>
+            </a:p>
+            <a:p>
+              <a:pPr>
+                <a:lnSpc>
+                  <a:spcPct val="150000"/>
+                </a:lnSpc>
+              </a:pPr>
+              <a:r>
+                <a:rPr lang="en-US" altLang="ko-KR" sz="1200" b="1">
+                  <a:solidFill>
+                    <a:srgbClr val="C00000"/>
+                  </a:solidFill>
+                </a:rPr>
+                <a:t>Dependency Registration</a:t>
+              </a:r>
+            </a:p>
+          </p:txBody>
+        </p:sp>
       </p:grpSp>
       <p:sp>
         <p:nvSpPr>
-          <p:cNvPr id="22" name="직사각형 21">
-            <a:extLst>
-              <a:ext uri="{FF2B5EF4-FFF2-40B4-BE49-F238E27FC236}">
-                <a16:creationId xmlns:a16="http://schemas.microsoft.com/office/drawing/2014/main" id="{C3BEE7B2-2CD3-0446-B6B2-FC441B6A6B03}"/>
+          <p:cNvPr id="6" name="직사각형 5">
+            <a:extLst>
+              <a:ext uri="{FF2B5EF4-FFF2-40B4-BE49-F238E27FC236}">
+                <a16:creationId xmlns:a16="http://schemas.microsoft.com/office/drawing/2014/main" id="{14328AF9-F9CF-A7A6-A685-6BAFD38CDE60}"/>
               </a:ext>
             </a:extLst>
           </p:cNvPr>
@@ -9860,18 +12146,13 @@
         </p:nvSpPr>
         <p:spPr>
           <a:xfrm>
-            <a:off x="5463252" y="5105868"/>
-            <a:ext cx="1513301" cy="758941"/>
+            <a:off x="955964" y="316923"/>
+            <a:ext cx="10790959" cy="6322868"/>
           </a:xfrm>
           <a:prstGeom prst="rect">
             <a:avLst/>
           </a:prstGeom>
           <a:noFill/>
-          <a:ln>
-            <a:solidFill>
-              <a:srgbClr val="A4A4A4"/>
-            </a:solidFill>
-          </a:ln>
         </p:spPr>
         <p:style>
           <a:lnRef idx="2">
@@ -9894,956 +12175,14 @@
           <a:lstStyle/>
           <a:p>
             <a:pPr algn="ctr"/>
-            <a:endParaRPr lang="ko-KR" altLang="en-US"/>
-          </a:p>
-        </p:txBody>
-      </p:sp>
-      <p:cxnSp>
-        <p:nvCxnSpPr>
-          <p:cNvPr id="24" name="직선 화살표 연결선 23">
-            <a:extLst>
-              <a:ext uri="{FF2B5EF4-FFF2-40B4-BE49-F238E27FC236}">
-                <a16:creationId xmlns:a16="http://schemas.microsoft.com/office/drawing/2014/main" id="{81D521E4-3049-C7CC-E4E3-4B1C2DA6CC82}"/>
-              </a:ext>
-            </a:extLst>
-          </p:cNvPr>
-          <p:cNvCxnSpPr>
-            <a:cxnSpLocks/>
-          </p:cNvCxnSpPr>
-          <p:nvPr/>
-        </p:nvCxnSpPr>
-        <p:spPr>
-          <a:xfrm>
-            <a:off x="6219903" y="3852167"/>
-            <a:ext cx="0" cy="1253701"/>
-          </a:xfrm>
-          <a:prstGeom prst="straightConnector1">
-            <a:avLst/>
-          </a:prstGeom>
-          <a:ln>
-            <a:solidFill>
-              <a:srgbClr val="A4A4A4"/>
-            </a:solidFill>
-            <a:tailEnd type="triangle"/>
-          </a:ln>
-        </p:spPr>
-        <p:style>
-          <a:lnRef idx="2">
-            <a:schemeClr val="accent1"/>
-          </a:lnRef>
-          <a:fillRef idx="0">
-            <a:schemeClr val="accent1"/>
-          </a:fillRef>
-          <a:effectRef idx="1">
-            <a:schemeClr val="accent1"/>
-          </a:effectRef>
-          <a:fontRef idx="minor">
-            <a:schemeClr val="tx1"/>
-          </a:fontRef>
-        </p:style>
-      </p:cxnSp>
-      <p:sp>
-        <p:nvSpPr>
-          <p:cNvPr id="25" name="직사각형 24">
-            <a:extLst>
-              <a:ext uri="{FF2B5EF4-FFF2-40B4-BE49-F238E27FC236}">
-                <a16:creationId xmlns:a16="http://schemas.microsoft.com/office/drawing/2014/main" id="{322FA9A3-979D-361D-2BE7-ECF9F40A2FAD}"/>
-              </a:ext>
-            </a:extLst>
-          </p:cNvPr>
-          <p:cNvSpPr/>
-          <p:nvPr/>
-        </p:nvSpPr>
-        <p:spPr>
-          <a:xfrm flipV="1">
-            <a:off x="6083022" y="3609338"/>
-            <a:ext cx="273761" cy="242829"/>
-          </a:xfrm>
-          <a:prstGeom prst="rect">
-            <a:avLst/>
-          </a:prstGeom>
-          <a:noFill/>
-          <a:ln>
-            <a:noFill/>
-          </a:ln>
-        </p:spPr>
-        <p:style>
-          <a:lnRef idx="2">
-            <a:schemeClr val="accent1">
-              <a:shade val="15000"/>
-            </a:schemeClr>
-          </a:lnRef>
-          <a:fillRef idx="1">
-            <a:schemeClr val="accent1"/>
-          </a:fillRef>
-          <a:effectRef idx="0">
-            <a:schemeClr val="accent1"/>
-          </a:effectRef>
-          <a:fontRef idx="minor">
-            <a:schemeClr val="lt1"/>
-          </a:fontRef>
-        </p:style>
-        <p:txBody>
-          <a:bodyPr rtlCol="0" anchor="ctr"/>
-          <a:lstStyle/>
-          <a:p>
-            <a:pPr algn="ctr"/>
-            <a:endParaRPr lang="ko-KR" altLang="en-US">
-              <a:noFill/>
-            </a:endParaRPr>
-          </a:p>
-        </p:txBody>
-      </p:sp>
-      <p:sp>
-        <p:nvSpPr>
-          <p:cNvPr id="26" name="직사각형 25">
-            <a:extLst>
-              <a:ext uri="{FF2B5EF4-FFF2-40B4-BE49-F238E27FC236}">
-                <a16:creationId xmlns:a16="http://schemas.microsoft.com/office/drawing/2014/main" id="{45460BC6-DCC8-0C50-2422-A76079D27C82}"/>
-              </a:ext>
-            </a:extLst>
-          </p:cNvPr>
-          <p:cNvSpPr/>
-          <p:nvPr/>
-        </p:nvSpPr>
-        <p:spPr>
-          <a:xfrm flipV="1">
-            <a:off x="6083022" y="5105868"/>
-            <a:ext cx="273761" cy="242829"/>
-          </a:xfrm>
-          <a:prstGeom prst="rect">
-            <a:avLst/>
-          </a:prstGeom>
-          <a:noFill/>
-          <a:ln>
-            <a:noFill/>
-          </a:ln>
-        </p:spPr>
-        <p:style>
-          <a:lnRef idx="2">
-            <a:schemeClr val="accent1">
-              <a:shade val="15000"/>
-            </a:schemeClr>
-          </a:lnRef>
-          <a:fillRef idx="1">
-            <a:schemeClr val="accent1"/>
-          </a:fillRef>
-          <a:effectRef idx="0">
-            <a:schemeClr val="accent1"/>
-          </a:effectRef>
-          <a:fontRef idx="minor">
-            <a:schemeClr val="lt1"/>
-          </a:fontRef>
-        </p:style>
-        <p:txBody>
-          <a:bodyPr rtlCol="0" anchor="ctr"/>
-          <a:lstStyle/>
-          <a:p>
-            <a:pPr algn="ctr"/>
-            <a:endParaRPr lang="ko-KR" altLang="en-US">
-              <a:noFill/>
-            </a:endParaRPr>
-          </a:p>
-        </p:txBody>
-      </p:sp>
-      <p:sp>
-        <p:nvSpPr>
-          <p:cNvPr id="3" name="TextBox 2">
-            <a:extLst>
-              <a:ext uri="{FF2B5EF4-FFF2-40B4-BE49-F238E27FC236}">
-                <a16:creationId xmlns:a16="http://schemas.microsoft.com/office/drawing/2014/main" id="{0F9B973E-3BD3-A604-6C54-D626FD0B71FC}"/>
-              </a:ext>
-            </a:extLst>
-          </p:cNvPr>
-          <p:cNvSpPr txBox="1"/>
-          <p:nvPr/>
-        </p:nvSpPr>
-        <p:spPr>
-          <a:xfrm>
-            <a:off x="5743292" y="5316061"/>
-            <a:ext cx="946093" cy="338554"/>
-          </a:xfrm>
-          <a:prstGeom prst="rect">
-            <a:avLst/>
-          </a:prstGeom>
-          <a:noFill/>
-        </p:spPr>
-        <p:txBody>
-          <a:bodyPr wrap="none" rtlCol="0">
-            <a:spAutoFit/>
-          </a:bodyPr>
-          <a:lstStyle/>
-          <a:p>
-            <a:r>
-              <a:rPr lang="en-US" altLang="ko-KR" sz="1600" b="1">
-                <a:solidFill>
-                  <a:srgbClr val="708A41"/>
-                </a:solidFill>
-              </a:rPr>
-              <a:t>Domain</a:t>
-            </a:r>
-            <a:endParaRPr lang="ko-KR" altLang="en-US" sz="1600" b="1">
-              <a:solidFill>
-                <a:srgbClr val="708A41"/>
-              </a:solidFill>
-            </a:endParaRPr>
-          </a:p>
-        </p:txBody>
-      </p:sp>
-      <p:sp>
-        <p:nvSpPr>
-          <p:cNvPr id="14" name="타원 13">
-            <a:extLst>
-              <a:ext uri="{FF2B5EF4-FFF2-40B4-BE49-F238E27FC236}">
-                <a16:creationId xmlns:a16="http://schemas.microsoft.com/office/drawing/2014/main" id="{18299F34-6385-6CAD-AC6B-59DF96B9DB1D}"/>
-              </a:ext>
-            </a:extLst>
-          </p:cNvPr>
-          <p:cNvSpPr/>
-          <p:nvPr/>
-        </p:nvSpPr>
-        <p:spPr>
-          <a:xfrm>
-            <a:off x="4890789" y="4469319"/>
-            <a:ext cx="2702504" cy="2597849"/>
-          </a:xfrm>
-          <a:prstGeom prst="ellipse">
-            <a:avLst/>
-          </a:prstGeom>
-          <a:ln>
-            <a:solidFill>
-              <a:schemeClr val="bg1">
-                <a:lumMod val="85000"/>
-              </a:schemeClr>
-            </a:solidFill>
-            <a:prstDash val="dash"/>
-          </a:ln>
-        </p:spPr>
-        <p:style>
-          <a:lnRef idx="2">
-            <a:schemeClr val="accent1"/>
-          </a:lnRef>
-          <a:fillRef idx="0">
-            <a:schemeClr val="accent1"/>
-          </a:fillRef>
-          <a:effectRef idx="1">
-            <a:schemeClr val="accent1"/>
-          </a:effectRef>
-          <a:fontRef idx="minor">
-            <a:schemeClr val="tx1"/>
-          </a:fontRef>
-        </p:style>
-        <p:txBody>
-          <a:bodyPr rtlCol="0" anchor="ctr"/>
-          <a:lstStyle/>
-          <a:p>
-            <a:pPr algn="ctr"/>
-            <a:endParaRPr lang="ko-KR" altLang="en-US"/>
-          </a:p>
-        </p:txBody>
-      </p:sp>
-      <p:sp>
-        <p:nvSpPr>
-          <p:cNvPr id="18" name="직사각형 17">
-            <a:extLst>
-              <a:ext uri="{FF2B5EF4-FFF2-40B4-BE49-F238E27FC236}">
-                <a16:creationId xmlns:a16="http://schemas.microsoft.com/office/drawing/2014/main" id="{C1BB0D87-D596-F3F3-0908-3D206E73F043}"/>
-              </a:ext>
-            </a:extLst>
-          </p:cNvPr>
-          <p:cNvSpPr/>
-          <p:nvPr/>
-        </p:nvSpPr>
-        <p:spPr>
-          <a:xfrm>
-            <a:off x="4794241" y="5884474"/>
-            <a:ext cx="2900515" cy="1257356"/>
-          </a:xfrm>
-          <a:prstGeom prst="rect">
-            <a:avLst/>
-          </a:prstGeom>
-          <a:solidFill>
-            <a:schemeClr val="bg1"/>
-          </a:solidFill>
-          <a:ln>
-            <a:solidFill>
-              <a:schemeClr val="bg1"/>
-            </a:solidFill>
-          </a:ln>
-        </p:spPr>
-        <p:style>
-          <a:lnRef idx="2">
-            <a:schemeClr val="accent1">
-              <a:shade val="15000"/>
-            </a:schemeClr>
-          </a:lnRef>
-          <a:fillRef idx="1">
-            <a:schemeClr val="accent1"/>
-          </a:fillRef>
-          <a:effectRef idx="0">
-            <a:schemeClr val="accent1"/>
-          </a:effectRef>
-          <a:fontRef idx="minor">
-            <a:schemeClr val="lt1"/>
-          </a:fontRef>
-        </p:style>
-        <p:txBody>
-          <a:bodyPr rtlCol="0" anchor="ctr"/>
-          <a:lstStyle/>
-          <a:p>
-            <a:pPr algn="ctr"/>
-            <a:endParaRPr lang="ko-KR" altLang="en-US">
-              <a:ln>
-                <a:solidFill>
-                  <a:schemeClr val="bg1"/>
-                </a:solidFill>
-              </a:ln>
-              <a:solidFill>
-                <a:schemeClr val="bg1"/>
-              </a:solidFill>
-            </a:endParaRPr>
-          </a:p>
-        </p:txBody>
-      </p:sp>
-      <p:sp>
-        <p:nvSpPr>
-          <p:cNvPr id="27" name="TextBox 26">
-            <a:extLst>
-              <a:ext uri="{FF2B5EF4-FFF2-40B4-BE49-F238E27FC236}">
-                <a16:creationId xmlns:a16="http://schemas.microsoft.com/office/drawing/2014/main" id="{7E735544-6F6A-74E4-FE70-8FC423435405}"/>
-              </a:ext>
-            </a:extLst>
-          </p:cNvPr>
-          <p:cNvSpPr txBox="1"/>
-          <p:nvPr/>
-        </p:nvSpPr>
-        <p:spPr>
-          <a:xfrm>
-            <a:off x="5515720" y="5985246"/>
-            <a:ext cx="1367362" cy="307777"/>
-          </a:xfrm>
-          <a:prstGeom prst="rect">
-            <a:avLst/>
-          </a:prstGeom>
-          <a:noFill/>
-        </p:spPr>
-        <p:txBody>
-          <a:bodyPr wrap="none" rtlCol="0">
-            <a:spAutoFit/>
-          </a:bodyPr>
-          <a:lstStyle/>
-          <a:p>
-            <a:r>
-              <a:rPr lang="en-US" altLang="ko-KR" sz="1400" b="1">
-                <a:solidFill>
-                  <a:srgbClr val="0070C0"/>
-                </a:solidFill>
-              </a:rPr>
-              <a:t>Domain </a:t>
-            </a:r>
-            <a:r>
-              <a:rPr lang="en-GB" altLang="ko-KR" sz="1400" b="1">
-                <a:solidFill>
-                  <a:srgbClr val="0070C0"/>
-                </a:solidFill>
-              </a:rPr>
-              <a:t>Layer</a:t>
-            </a:r>
-            <a:endParaRPr lang="ko-KR" altLang="en-US" sz="1400" b="1">
-              <a:solidFill>
-                <a:srgbClr val="0070C0"/>
-              </a:solidFill>
-            </a:endParaRPr>
-          </a:p>
-        </p:txBody>
-      </p:sp>
-      <p:sp>
-        <p:nvSpPr>
-          <p:cNvPr id="29" name="사각형: 둥근 모서리 28">
-            <a:extLst>
-              <a:ext uri="{FF2B5EF4-FFF2-40B4-BE49-F238E27FC236}">
-                <a16:creationId xmlns:a16="http://schemas.microsoft.com/office/drawing/2014/main" id="{427FDB2B-312C-7E5E-0FF2-F9E25325785E}"/>
-              </a:ext>
-            </a:extLst>
-          </p:cNvPr>
-          <p:cNvSpPr/>
-          <p:nvPr/>
-        </p:nvSpPr>
-        <p:spPr>
-          <a:xfrm>
-            <a:off x="1445340" y="2665771"/>
-            <a:ext cx="188018" cy="1582993"/>
-          </a:xfrm>
-          <a:prstGeom prst="roundRect">
-            <a:avLst/>
-          </a:prstGeom>
-        </p:spPr>
-        <p:style>
-          <a:lnRef idx="2">
-            <a:schemeClr val="accent1">
-              <a:shade val="15000"/>
-            </a:schemeClr>
-          </a:lnRef>
-          <a:fillRef idx="1">
-            <a:schemeClr val="accent1"/>
-          </a:fillRef>
-          <a:effectRef idx="0">
-            <a:schemeClr val="accent1"/>
-          </a:effectRef>
-          <a:fontRef idx="minor">
-            <a:schemeClr val="lt1"/>
-          </a:fontRef>
-        </p:style>
-        <p:txBody>
-          <a:bodyPr rtlCol="0" anchor="ctr"/>
-          <a:lstStyle/>
-          <a:p>
-            <a:pPr algn="ctr"/>
-            <a:endParaRPr lang="ko-KR" altLang="en-US"/>
-          </a:p>
-        </p:txBody>
-      </p:sp>
-      <p:sp>
-        <p:nvSpPr>
-          <p:cNvPr id="32" name="사각형: 둥근 모서리 31">
-            <a:extLst>
-              <a:ext uri="{FF2B5EF4-FFF2-40B4-BE49-F238E27FC236}">
-                <a16:creationId xmlns:a16="http://schemas.microsoft.com/office/drawing/2014/main" id="{9FADE76B-6282-5D15-AD98-D97595982936}"/>
-              </a:ext>
-            </a:extLst>
-          </p:cNvPr>
-          <p:cNvSpPr/>
-          <p:nvPr/>
-        </p:nvSpPr>
-        <p:spPr>
-          <a:xfrm>
-            <a:off x="5178618" y="2665771"/>
-            <a:ext cx="188018" cy="1582993"/>
-          </a:xfrm>
-          <a:prstGeom prst="roundRect">
-            <a:avLst/>
-          </a:prstGeom>
-          <a:solidFill>
-            <a:schemeClr val="accent2">
-              <a:lumMod val="20000"/>
-              <a:lumOff val="80000"/>
-            </a:schemeClr>
-          </a:solidFill>
-          <a:ln>
-            <a:solidFill>
-              <a:srgbClr val="C00000"/>
-            </a:solidFill>
-          </a:ln>
-        </p:spPr>
-        <p:style>
-          <a:lnRef idx="2">
-            <a:schemeClr val="accent1">
-              <a:shade val="15000"/>
-            </a:schemeClr>
-          </a:lnRef>
-          <a:fillRef idx="1">
-            <a:schemeClr val="accent1"/>
-          </a:fillRef>
-          <a:effectRef idx="0">
-            <a:schemeClr val="accent1"/>
-          </a:effectRef>
-          <a:fontRef idx="minor">
-            <a:schemeClr val="lt1"/>
-          </a:fontRef>
-        </p:style>
-        <p:txBody>
-          <a:bodyPr rtlCol="0" anchor="ctr"/>
-          <a:lstStyle/>
-          <a:p>
-            <a:pPr algn="ctr"/>
-            <a:endParaRPr lang="ko-KR" altLang="en-US"/>
-          </a:p>
-        </p:txBody>
-      </p:sp>
-      <p:sp>
-        <p:nvSpPr>
-          <p:cNvPr id="33" name="사각형: 둥근 모서리 32">
-            <a:extLst>
-              <a:ext uri="{FF2B5EF4-FFF2-40B4-BE49-F238E27FC236}">
-                <a16:creationId xmlns:a16="http://schemas.microsoft.com/office/drawing/2014/main" id="{B3B710AF-5251-578E-C64F-BDB5452C63B8}"/>
-              </a:ext>
-            </a:extLst>
-          </p:cNvPr>
-          <p:cNvSpPr/>
-          <p:nvPr/>
-        </p:nvSpPr>
-        <p:spPr>
-          <a:xfrm>
-            <a:off x="8560423" y="2665771"/>
-            <a:ext cx="188018" cy="1582993"/>
-          </a:xfrm>
-          <a:prstGeom prst="roundRect">
-            <a:avLst/>
-          </a:prstGeom>
-          <a:solidFill>
-            <a:schemeClr val="accent2">
-              <a:lumMod val="20000"/>
-              <a:lumOff val="80000"/>
-            </a:schemeClr>
-          </a:solidFill>
-          <a:ln>
-            <a:solidFill>
-              <a:srgbClr val="C00000"/>
-            </a:solidFill>
-          </a:ln>
-        </p:spPr>
-        <p:style>
-          <a:lnRef idx="2">
-            <a:schemeClr val="accent1">
-              <a:shade val="15000"/>
-            </a:schemeClr>
-          </a:lnRef>
-          <a:fillRef idx="1">
-            <a:schemeClr val="accent1"/>
-          </a:fillRef>
-          <a:effectRef idx="0">
-            <a:schemeClr val="accent1"/>
-          </a:effectRef>
-          <a:fontRef idx="minor">
-            <a:schemeClr val="lt1"/>
-          </a:fontRef>
-        </p:style>
-        <p:txBody>
-          <a:bodyPr rtlCol="0" anchor="ctr"/>
-          <a:lstStyle/>
-          <a:p>
-            <a:pPr algn="ctr"/>
-            <a:endParaRPr lang="ko-KR" altLang="en-US"/>
-          </a:p>
-        </p:txBody>
-      </p:sp>
-      <p:sp>
-        <p:nvSpPr>
-          <p:cNvPr id="39" name="사각형: 둥근 모서리 38">
-            <a:extLst>
-              <a:ext uri="{FF2B5EF4-FFF2-40B4-BE49-F238E27FC236}">
-                <a16:creationId xmlns:a16="http://schemas.microsoft.com/office/drawing/2014/main" id="{E1A9C31F-063C-3C37-BE35-E1763A3E13B2}"/>
-              </a:ext>
-            </a:extLst>
-          </p:cNvPr>
-          <p:cNvSpPr/>
-          <p:nvPr/>
-        </p:nvSpPr>
-        <p:spPr>
-          <a:xfrm>
-            <a:off x="10962011" y="2665771"/>
-            <a:ext cx="188018" cy="1582993"/>
-          </a:xfrm>
-          <a:prstGeom prst="roundRect">
-            <a:avLst/>
-          </a:prstGeom>
-        </p:spPr>
-        <p:style>
-          <a:lnRef idx="2">
-            <a:schemeClr val="accent1">
-              <a:shade val="15000"/>
-            </a:schemeClr>
-          </a:lnRef>
-          <a:fillRef idx="1">
-            <a:schemeClr val="accent1"/>
-          </a:fillRef>
-          <a:effectRef idx="0">
-            <a:schemeClr val="accent1"/>
-          </a:effectRef>
-          <a:fontRef idx="minor">
-            <a:schemeClr val="lt1"/>
-          </a:fontRef>
-        </p:style>
-        <p:txBody>
-          <a:bodyPr rtlCol="0" anchor="ctr"/>
-          <a:lstStyle/>
-          <a:p>
-            <a:pPr algn="ctr"/>
-            <a:endParaRPr lang="ko-KR" altLang="en-US"/>
-          </a:p>
-        </p:txBody>
-      </p:sp>
-      <p:sp>
-        <p:nvSpPr>
-          <p:cNvPr id="40" name="사각형: 둥근 모서리 39">
-            <a:extLst>
-              <a:ext uri="{FF2B5EF4-FFF2-40B4-BE49-F238E27FC236}">
-                <a16:creationId xmlns:a16="http://schemas.microsoft.com/office/drawing/2014/main" id="{F6943E91-D213-8CE0-84A7-6AED65B4FBA4}"/>
-              </a:ext>
-            </a:extLst>
-          </p:cNvPr>
-          <p:cNvSpPr/>
-          <p:nvPr/>
-        </p:nvSpPr>
-        <p:spPr>
-          <a:xfrm rot="16200000">
-            <a:off x="6138200" y="4355776"/>
-            <a:ext cx="188018" cy="936000"/>
-          </a:xfrm>
-          <a:prstGeom prst="roundRect">
-            <a:avLst/>
-          </a:prstGeom>
-          <a:solidFill>
-            <a:schemeClr val="accent2">
-              <a:lumMod val="20000"/>
-              <a:lumOff val="80000"/>
-            </a:schemeClr>
-          </a:solidFill>
-          <a:ln>
-            <a:solidFill>
-              <a:srgbClr val="C00000"/>
-            </a:solidFill>
-            <a:prstDash val="dash"/>
-          </a:ln>
-        </p:spPr>
-        <p:style>
-          <a:lnRef idx="2">
-            <a:schemeClr val="accent1">
-              <a:shade val="15000"/>
-            </a:schemeClr>
-          </a:lnRef>
-          <a:fillRef idx="1">
-            <a:schemeClr val="accent1"/>
-          </a:fillRef>
-          <a:effectRef idx="0">
-            <a:schemeClr val="accent1"/>
-          </a:effectRef>
-          <a:fontRef idx="minor">
-            <a:schemeClr val="lt1"/>
-          </a:fontRef>
-        </p:style>
-        <p:txBody>
-          <a:bodyPr rtlCol="0" anchor="ctr"/>
-          <a:lstStyle/>
-          <a:p>
-            <a:pPr algn="ctr"/>
-            <a:endParaRPr lang="ko-KR" altLang="en-US">
-              <a:ln>
-                <a:solidFill>
-                  <a:schemeClr val="tx1"/>
-                </a:solidFill>
-                <a:prstDash val="dash"/>
-              </a:ln>
-            </a:endParaRPr>
-          </a:p>
-        </p:txBody>
-      </p:sp>
-      <p:sp>
-        <p:nvSpPr>
-          <p:cNvPr id="41" name="TextBox 40">
-            <a:extLst>
-              <a:ext uri="{FF2B5EF4-FFF2-40B4-BE49-F238E27FC236}">
-                <a16:creationId xmlns:a16="http://schemas.microsoft.com/office/drawing/2014/main" id="{2B0CA7C8-F31C-20FA-CC65-B2B352DB5D46}"/>
-              </a:ext>
-            </a:extLst>
-          </p:cNvPr>
-          <p:cNvSpPr txBox="1"/>
-          <p:nvPr/>
-        </p:nvSpPr>
-        <p:spPr>
-          <a:xfrm>
-            <a:off x="460915" y="4570156"/>
-            <a:ext cx="1314719" cy="307777"/>
-          </a:xfrm>
-          <a:prstGeom prst="rect">
-            <a:avLst/>
-          </a:prstGeom>
-          <a:noFill/>
-        </p:spPr>
-        <p:txBody>
-          <a:bodyPr wrap="none" rtlCol="0">
-            <a:spAutoFit/>
-          </a:bodyPr>
-          <a:lstStyle/>
-          <a:p>
-            <a:r>
-              <a:rPr lang="en-GB" altLang="ko-KR" sz="1400" b="1"/>
-              <a:t>Observability</a:t>
-            </a:r>
-            <a:endParaRPr lang="ko-KR" altLang="en-US" sz="1400" b="1"/>
-          </a:p>
-        </p:txBody>
-      </p:sp>
-      <p:sp>
-        <p:nvSpPr>
-          <p:cNvPr id="42" name="사각형: 둥근 모서리 41">
-            <a:extLst>
-              <a:ext uri="{FF2B5EF4-FFF2-40B4-BE49-F238E27FC236}">
-                <a16:creationId xmlns:a16="http://schemas.microsoft.com/office/drawing/2014/main" id="{56154BD1-16B4-7748-E050-19C1CAFB5E24}"/>
-              </a:ext>
-            </a:extLst>
-          </p:cNvPr>
-          <p:cNvSpPr/>
-          <p:nvPr/>
-        </p:nvSpPr>
-        <p:spPr>
-          <a:xfrm>
-            <a:off x="616570" y="5016111"/>
-            <a:ext cx="289851" cy="236170"/>
-          </a:xfrm>
-          <a:prstGeom prst="roundRect">
-            <a:avLst/>
-          </a:prstGeom>
-        </p:spPr>
-        <p:style>
-          <a:lnRef idx="2">
-            <a:schemeClr val="accent1">
-              <a:shade val="15000"/>
-            </a:schemeClr>
-          </a:lnRef>
-          <a:fillRef idx="1">
-            <a:schemeClr val="accent1"/>
-          </a:fillRef>
-          <a:effectRef idx="0">
-            <a:schemeClr val="accent1"/>
-          </a:effectRef>
-          <a:fontRef idx="minor">
-            <a:schemeClr val="lt1"/>
-          </a:fontRef>
-        </p:style>
-        <p:txBody>
-          <a:bodyPr rtlCol="0" anchor="ctr"/>
-          <a:lstStyle/>
-          <a:p>
-            <a:pPr algn="ctr"/>
-            <a:endParaRPr lang="ko-KR" altLang="en-US"/>
-          </a:p>
-        </p:txBody>
-      </p:sp>
-      <p:sp>
-        <p:nvSpPr>
-          <p:cNvPr id="43" name="사각형: 둥근 모서리 42">
-            <a:extLst>
-              <a:ext uri="{FF2B5EF4-FFF2-40B4-BE49-F238E27FC236}">
-                <a16:creationId xmlns:a16="http://schemas.microsoft.com/office/drawing/2014/main" id="{34434E2B-550E-6470-C313-6FB32359B975}"/>
-              </a:ext>
-            </a:extLst>
-          </p:cNvPr>
-          <p:cNvSpPr/>
-          <p:nvPr/>
-        </p:nvSpPr>
-        <p:spPr>
-          <a:xfrm>
-            <a:off x="616570" y="5377436"/>
-            <a:ext cx="289851" cy="236170"/>
-          </a:xfrm>
-          <a:prstGeom prst="roundRect">
-            <a:avLst/>
-          </a:prstGeom>
-          <a:solidFill>
-            <a:schemeClr val="accent2">
-              <a:lumMod val="20000"/>
-              <a:lumOff val="80000"/>
-            </a:schemeClr>
-          </a:solidFill>
-          <a:ln>
-            <a:solidFill>
-              <a:srgbClr val="C00000"/>
-            </a:solidFill>
-          </a:ln>
-        </p:spPr>
-        <p:style>
-          <a:lnRef idx="2">
-            <a:schemeClr val="accent1">
-              <a:shade val="15000"/>
-            </a:schemeClr>
-          </a:lnRef>
-          <a:fillRef idx="1">
-            <a:schemeClr val="accent1"/>
-          </a:fillRef>
-          <a:effectRef idx="0">
-            <a:schemeClr val="accent1"/>
-          </a:effectRef>
-          <a:fontRef idx="minor">
-            <a:schemeClr val="lt1"/>
-          </a:fontRef>
-        </p:style>
-        <p:txBody>
-          <a:bodyPr rtlCol="0" anchor="ctr"/>
-          <a:lstStyle/>
-          <a:p>
-            <a:pPr algn="ctr"/>
-            <a:endParaRPr lang="ko-KR" altLang="en-US"/>
-          </a:p>
-        </p:txBody>
-      </p:sp>
-      <p:sp>
-        <p:nvSpPr>
-          <p:cNvPr id="44" name="사각형: 둥근 모서리 43">
-            <a:extLst>
-              <a:ext uri="{FF2B5EF4-FFF2-40B4-BE49-F238E27FC236}">
-                <a16:creationId xmlns:a16="http://schemas.microsoft.com/office/drawing/2014/main" id="{B4942D3D-5C5A-9008-D6FF-0BA54515D5A5}"/>
-              </a:ext>
-            </a:extLst>
-          </p:cNvPr>
-          <p:cNvSpPr/>
-          <p:nvPr/>
-        </p:nvSpPr>
-        <p:spPr>
-          <a:xfrm>
-            <a:off x="616570" y="5728661"/>
-            <a:ext cx="289851" cy="236170"/>
-          </a:xfrm>
-          <a:prstGeom prst="roundRect">
-            <a:avLst/>
-          </a:prstGeom>
-          <a:solidFill>
-            <a:schemeClr val="accent2">
-              <a:lumMod val="20000"/>
-              <a:lumOff val="80000"/>
-            </a:schemeClr>
-          </a:solidFill>
-          <a:ln>
-            <a:solidFill>
-              <a:srgbClr val="C00000"/>
-            </a:solidFill>
-            <a:prstDash val="dash"/>
-          </a:ln>
-        </p:spPr>
-        <p:style>
-          <a:lnRef idx="2">
-            <a:schemeClr val="accent1">
-              <a:shade val="15000"/>
-            </a:schemeClr>
-          </a:lnRef>
-          <a:fillRef idx="1">
-            <a:schemeClr val="accent1"/>
-          </a:fillRef>
-          <a:effectRef idx="0">
-            <a:schemeClr val="accent1"/>
-          </a:effectRef>
-          <a:fontRef idx="minor">
-            <a:schemeClr val="lt1"/>
-          </a:fontRef>
-        </p:style>
-        <p:txBody>
-          <a:bodyPr rtlCol="0" anchor="ctr"/>
-          <a:lstStyle/>
-          <a:p>
-            <a:pPr algn="ctr"/>
-            <a:endParaRPr lang="ko-KR" altLang="en-US">
-              <a:ln>
-                <a:solidFill>
-                  <a:schemeClr val="tx1"/>
-                </a:solidFill>
-                <a:prstDash val="dash"/>
-              </a:ln>
-            </a:endParaRPr>
-          </a:p>
-        </p:txBody>
-      </p:sp>
-      <p:sp>
-        <p:nvSpPr>
-          <p:cNvPr id="45" name="TextBox 44">
-            <a:extLst>
-              <a:ext uri="{FF2B5EF4-FFF2-40B4-BE49-F238E27FC236}">
-                <a16:creationId xmlns:a16="http://schemas.microsoft.com/office/drawing/2014/main" id="{B048C73E-58E3-3CB0-B2FA-C84FDD300391}"/>
-              </a:ext>
-            </a:extLst>
-          </p:cNvPr>
-          <p:cNvSpPr txBox="1"/>
-          <p:nvPr/>
-        </p:nvSpPr>
-        <p:spPr>
-          <a:xfrm>
-            <a:off x="1046383" y="5016111"/>
-            <a:ext cx="4026359" cy="276999"/>
-          </a:xfrm>
-          <a:prstGeom prst="rect">
-            <a:avLst/>
-          </a:prstGeom>
-          <a:noFill/>
-        </p:spPr>
-        <p:txBody>
-          <a:bodyPr wrap="none" rtlCol="0">
-            <a:spAutoFit/>
-          </a:bodyPr>
-          <a:lstStyle/>
-          <a:p>
-            <a:r>
-              <a:rPr lang="en-GB" sz="1200"/>
-              <a:t>No implementation required: provided by the package</a:t>
-            </a:r>
-            <a:endParaRPr lang="ko-KR" altLang="en-US" sz="1200"/>
-          </a:p>
-        </p:txBody>
-      </p:sp>
-      <p:sp>
-        <p:nvSpPr>
-          <p:cNvPr id="46" name="TextBox 45">
-            <a:extLst>
-              <a:ext uri="{FF2B5EF4-FFF2-40B4-BE49-F238E27FC236}">
-                <a16:creationId xmlns:a16="http://schemas.microsoft.com/office/drawing/2014/main" id="{21ECD4BD-4102-9A0B-EDC3-D252D7625995}"/>
-              </a:ext>
-            </a:extLst>
-          </p:cNvPr>
-          <p:cNvSpPr txBox="1"/>
-          <p:nvPr/>
-        </p:nvSpPr>
-        <p:spPr>
-          <a:xfrm>
-            <a:off x="1046383" y="5369033"/>
-            <a:ext cx="1954831" cy="276999"/>
-          </a:xfrm>
-          <a:prstGeom prst="rect">
-            <a:avLst/>
-          </a:prstGeom>
-          <a:noFill/>
-        </p:spPr>
-        <p:txBody>
-          <a:bodyPr wrap="none" rtlCol="0">
-            <a:spAutoFit/>
-          </a:bodyPr>
-          <a:lstStyle/>
-          <a:p>
-            <a:r>
-              <a:rPr lang="en-GB" sz="1200"/>
-              <a:t>implementation required</a:t>
-            </a:r>
-            <a:endParaRPr lang="ko-KR" altLang="en-US" sz="1200"/>
-          </a:p>
-        </p:txBody>
-      </p:sp>
-      <p:sp>
-        <p:nvSpPr>
-          <p:cNvPr id="47" name="TextBox 46">
-            <a:extLst>
-              <a:ext uri="{FF2B5EF4-FFF2-40B4-BE49-F238E27FC236}">
-                <a16:creationId xmlns:a16="http://schemas.microsoft.com/office/drawing/2014/main" id="{AA1DAF0B-41D4-4020-8EA6-6AD3337C9938}"/>
-              </a:ext>
-            </a:extLst>
-          </p:cNvPr>
-          <p:cNvSpPr txBox="1"/>
-          <p:nvPr/>
-        </p:nvSpPr>
-        <p:spPr>
-          <a:xfrm>
-            <a:off x="1046383" y="5708247"/>
-            <a:ext cx="2995179" cy="276999"/>
-          </a:xfrm>
-          <a:prstGeom prst="rect">
-            <a:avLst/>
-          </a:prstGeom>
-          <a:noFill/>
-        </p:spPr>
-        <p:txBody>
-          <a:bodyPr wrap="none" rtlCol="0">
-            <a:spAutoFit/>
-          </a:bodyPr>
-          <a:lstStyle/>
-          <a:p>
-            <a:r>
-              <a:rPr lang="en-GB" sz="1200"/>
-              <a:t>No implementation required: Functional</a:t>
-            </a:r>
-            <a:endParaRPr lang="ko-KR" altLang="en-US" sz="1200"/>
+            <a:endParaRPr lang="en-GB"/>
           </a:p>
         </p:txBody>
       </p:sp>
     </p:spTree>
     <p:extLst>
       <p:ext uri="{BB962C8B-B14F-4D97-AF65-F5344CB8AC3E}">
-        <p14:creationId xmlns:p14="http://schemas.microsoft.com/office/powerpoint/2010/main" val="1427290537"/>
+        <p14:creationId xmlns:p14="http://schemas.microsoft.com/office/powerpoint/2010/main" val="2842927546"/>
       </p:ext>
     </p:extLst>
   </p:cSld>
